--- a/slides/modules/m26-packaging-distributing.pptx
+++ b/slides/modules/m26-packaging-distributing.pptx
@@ -13,6 +13,7 @@
     <p:sldId id="261" r:id="rId13"/>
     <p:sldId id="262" r:id="rId14"/>
     <p:sldId id="263" r:id="rId15"/>
+    <p:sldId id="264" r:id="rId16"/>
   </p:sldIdLst>
   <p:sldSz cx="12191695" cy="6858000" type="screen4x3"/>
   <p:notesSz cx="6858000" cy="9144000"/>
@@ -930,6 +931,76 @@
           <a:p>
             <a:r>
               <a:t>Close on the thesis. First the direction of travel: OLM v1 is generally available and running on this cluster — four ClusterCatalogs serving — reshaped into two cluster-scoped objects, a ClusterCatalog (the catalog) and a ClusterExtension (your installed operator, with a ServiceAccount and RBAC you supply). But zero ClusterExtensions are installed and the current console doesn't surface it: classic OLM drives OperatorHub today and is what they dissected; OLM v1 is a five-minute "here's where it's going." Then the decision, made honestly. Having shipped a Helm chart and dissected an operator, the attendee places their own app on the spectrum. The honest rule — the one most teams get wrong: if your day-2 is "occasionally helm upgrade with new values," a chart already does that, and an operator would be a reconcile loop with nothing to reconcile plus a controller to build, certify, and keep alive for the product's life. Write the operator when the reconcile itself is the value — continuous drift repair, stateful upgrade, failover, many instances from one spec. The notifications service they packaged wants Helm, and saying so out loud is the senior move. That judgement — not the ability to write an operator — is the takeaway.</a:t>
+            </a:r>
+          </a:p>
+        </p:txBody>
+      </p:sp>
+      <p:sp>
+        <p:nvSpPr>
+          <p:cNvPr id="4" name="Slide Number Placeholder 3"/>
+          <p:cNvSpPr>
+            <a:spLocks noGrp="1"/>
+          </p:cNvSpPr>
+          <p:nvPr>
+            <p:ph type="sldNum" idx="5" sz="quarter"/>
+          </p:nvPr>
+        </p:nvSpPr>
+        <p:spPr/>
+      </p:sp>
+    </p:spTree>
+  </p:cSld>
+  <p:clrMapOvr>
+    <a:masterClrMapping/>
+  </p:clrMapOvr>
+</p:notes>
+</file>
+
+<file path=ppt/notesSlides/notesSlide8.xml><?xml version="1.0" encoding="utf-8"?>
+<p:notes xmlns:a="http://schemas.openxmlformats.org/drawingml/2006/main" xmlns:p="http://schemas.openxmlformats.org/presentationml/2006/main" xmlns:r="http://schemas.openxmlformats.org/officeDocument/2006/relationships">
+  <p:cSld>
+    <p:spTree>
+      <p:nvGrpSpPr>
+        <p:cNvPr id="1" name=""/>
+        <p:cNvGrpSpPr/>
+        <p:nvPr/>
+      </p:nvGrpSpPr>
+      <p:grpSpPr>
+        <a:xfrm>
+          <a:off x="0" y="0"/>
+          <a:ext cx="0" cy="0"/>
+          <a:chOff x="0" y="0"/>
+          <a:chExt cx="0" cy="0"/>
+        </a:xfrm>
+      </p:grpSpPr>
+      <p:sp>
+        <p:nvSpPr>
+          <p:cNvPr id="2" name="Slide Image Placeholder 1"/>
+          <p:cNvSpPr>
+            <a:spLocks noGrp="1"/>
+          </p:cNvSpPr>
+          <p:nvPr>
+            <p:ph type="sldImg" idx="2"/>
+          </p:nvPr>
+        </p:nvSpPr>
+        <p:spPr/>
+      </p:sp>
+      <p:sp>
+        <p:nvSpPr>
+          <p:cNvPr id="3" name="Notes Placeholder 2"/>
+          <p:cNvSpPr>
+            <a:spLocks noGrp="1"/>
+          </p:cNvSpPr>
+          <p:nvPr>
+            <p:ph type="body" idx="3" sz="quarter"/>
+          </p:nvPr>
+        </p:nvSpPr>
+        <p:spPr/>
+        <p:txBody>
+          <a:bodyPr/>
+          <a:lstStyle/>
+          <a:p>
+            <a:r>
+              <a:t>Concept diagram: What you built.</a:t>
             </a:r>
           </a:p>
         </p:txBody>
@@ -4352,11 +4423,11 @@
         <p:spPr>
           <a:xfrm>
             <a:off x="841248" y="2395728"/>
-            <a:ext cx="5715000" cy="530352"/>
+            <a:ext cx="5138928" cy="786384"/>
           </a:xfrm>
           <a:prstGeom prst="roundRect">
             <a:avLst>
-              <a:gd name="adj" fmla="val 6000"/>
+              <a:gd name="adj" fmla="val 7000"/>
             </a:avLst>
           </a:prstGeom>
           <a:solidFill>
@@ -4391,9 +4462,55 @@
           </a:p>
         </p:txBody>
       </p:sp>
+      <p:sp>
+        <p:nvSpPr>
+          <p:cNvPr id="7" name="Rounded Rectangle 6"/>
+          <p:cNvSpPr/>
+          <p:nvPr/>
+        </p:nvSpPr>
+        <p:spPr>
+          <a:xfrm>
+            <a:off x="987552" y="2532888"/>
+            <a:ext cx="512064" cy="512064"/>
+          </a:xfrm>
+          <a:prstGeom prst="roundRect">
+            <a:avLst>
+              <a:gd name="adj" fmla="val 26000"/>
+            </a:avLst>
+          </a:prstGeom>
+          <a:solidFill>
+            <a:srgbClr val="EE0000"/>
+          </a:solidFill>
+          <a:ln>
+            <a:noFill/>
+          </a:ln>
+          <a:effectLst/>
+        </p:spPr>
+        <p:style>
+          <a:lnRef idx="1">
+            <a:schemeClr val="accent1"/>
+          </a:lnRef>
+          <a:fillRef idx="3">
+            <a:schemeClr val="accent1"/>
+          </a:fillRef>
+          <a:effectRef idx="2">
+            <a:schemeClr val="accent1"/>
+          </a:effectRef>
+          <a:fontRef idx="minor">
+            <a:schemeClr val="lt1"/>
+          </a:fontRef>
+        </p:style>
+        <p:txBody>
+          <a:bodyPr rtlCol="0" anchor="ctr"/>
+          <a:lstStyle/>
+          <a:p>
+            <a:pPr algn="ctr"/>
+          </a:p>
+        </p:txBody>
+      </p:sp>
       <p:pic>
         <p:nvPicPr>
-          <p:cNvPr id="7" name="Picture 6" descr="check_steel.png"/>
+          <p:cNvPr id="8" name="Picture 7" descr="check_white.png"/>
           <p:cNvPicPr>
             <a:picLocks noChangeAspect="1"/>
           </p:cNvPicPr>
@@ -4407,8 +4524,8 @@
         </p:blipFill>
         <p:spPr>
           <a:xfrm>
-            <a:off x="987552" y="2542032"/>
-            <a:ext cx="237744" cy="237744"/>
+            <a:off x="1110447" y="2655783"/>
+            <a:ext cx="266273" cy="266273"/>
           </a:xfrm>
           <a:prstGeom prst="rect">
             <a:avLst/>
@@ -4417,14 +4534,14 @@
       </p:pic>
       <p:sp>
         <p:nvSpPr>
-          <p:cNvPr id="8" name="TextBox 7"/>
+          <p:cNvPr id="9" name="TextBox 8"/>
           <p:cNvSpPr txBox="1"/>
           <p:nvPr/>
         </p:nvSpPr>
         <p:spPr>
           <a:xfrm>
-            <a:off x="1353312" y="2395728"/>
-            <a:ext cx="5029200" cy="530352"/>
+            <a:off x="1627632" y="2395728"/>
+            <a:ext cx="4206240" cy="786384"/>
           </a:xfrm>
           <a:prstGeom prst="rect">
             <a:avLst/>
@@ -4449,7 +4566,7 @@
               </a:spcAft>
             </a:pPr>
             <a:r>
-              <a:rPr sz="1200" b="0">
+              <a:rPr sz="1150" b="0">
                 <a:solidFill>
                   <a:srgbClr val="1A1A1A"/>
                 </a:solidFill>
@@ -4462,18 +4579,18 @@
       </p:sp>
       <p:sp>
         <p:nvSpPr>
-          <p:cNvPr id="9" name="Rounded Rectangle 8"/>
+          <p:cNvPr id="10" name="Rounded Rectangle 9"/>
           <p:cNvSpPr/>
           <p:nvPr/>
         </p:nvSpPr>
         <p:spPr>
           <a:xfrm>
-            <a:off x="841248" y="2999232"/>
-            <a:ext cx="5715000" cy="530352"/>
+            <a:off x="6254496" y="2395728"/>
+            <a:ext cx="5138928" cy="786384"/>
           </a:xfrm>
           <a:prstGeom prst="roundRect">
             <a:avLst>
-              <a:gd name="adj" fmla="val 6000"/>
+              <a:gd name="adj" fmla="val 7000"/>
             </a:avLst>
           </a:prstGeom>
           <a:solidFill>
@@ -4508,9 +4625,55 @@
           </a:p>
         </p:txBody>
       </p:sp>
+      <p:sp>
+        <p:nvSpPr>
+          <p:cNvPr id="11" name="Rounded Rectangle 10"/>
+          <p:cNvSpPr/>
+          <p:nvPr/>
+        </p:nvSpPr>
+        <p:spPr>
+          <a:xfrm>
+            <a:off x="6400800" y="2532888"/>
+            <a:ext cx="512064" cy="512064"/>
+          </a:xfrm>
+          <a:prstGeom prst="roundRect">
+            <a:avLst>
+              <a:gd name="adj" fmla="val 26000"/>
+            </a:avLst>
+          </a:prstGeom>
+          <a:solidFill>
+            <a:srgbClr val="EE0000"/>
+          </a:solidFill>
+          <a:ln>
+            <a:noFill/>
+          </a:ln>
+          <a:effectLst/>
+        </p:spPr>
+        <p:style>
+          <a:lnRef idx="1">
+            <a:schemeClr val="accent1"/>
+          </a:lnRef>
+          <a:fillRef idx="3">
+            <a:schemeClr val="accent1"/>
+          </a:fillRef>
+          <a:effectRef idx="2">
+            <a:schemeClr val="accent1"/>
+          </a:effectRef>
+          <a:fontRef idx="minor">
+            <a:schemeClr val="lt1"/>
+          </a:fontRef>
+        </p:style>
+        <p:txBody>
+          <a:bodyPr rtlCol="0" anchor="ctr"/>
+          <a:lstStyle/>
+          <a:p>
+            <a:pPr algn="ctr"/>
+          </a:p>
+        </p:txBody>
+      </p:sp>
       <p:pic>
         <p:nvPicPr>
-          <p:cNvPr id="10" name="Picture 9" descr="check_steel.png"/>
+          <p:cNvPr id="12" name="Picture 11" descr="check_white.png"/>
           <p:cNvPicPr>
             <a:picLocks noChangeAspect="1"/>
           </p:cNvPicPr>
@@ -4524,8 +4687,8 @@
         </p:blipFill>
         <p:spPr>
           <a:xfrm>
-            <a:off x="987552" y="3145536"/>
-            <a:ext cx="237744" cy="237744"/>
+            <a:off x="6523695" y="2655783"/>
+            <a:ext cx="266273" cy="266273"/>
           </a:xfrm>
           <a:prstGeom prst="rect">
             <a:avLst/>
@@ -4534,14 +4697,14 @@
       </p:pic>
       <p:sp>
         <p:nvSpPr>
-          <p:cNvPr id="11" name="TextBox 10"/>
+          <p:cNvPr id="13" name="TextBox 12"/>
           <p:cNvSpPr txBox="1"/>
           <p:nvPr/>
         </p:nvSpPr>
         <p:spPr>
           <a:xfrm>
-            <a:off x="1353312" y="2999232"/>
-            <a:ext cx="5029200" cy="530352"/>
+            <a:off x="7040880" y="2395728"/>
+            <a:ext cx="4206240" cy="786384"/>
           </a:xfrm>
           <a:prstGeom prst="rect">
             <a:avLst/>
@@ -4566,7 +4729,7 @@
               </a:spcAft>
             </a:pPr>
             <a:r>
-              <a:rPr sz="1200" b="0">
+              <a:rPr sz="1150" b="0">
                 <a:solidFill>
                   <a:srgbClr val="1A1A1A"/>
                 </a:solidFill>
@@ -4579,18 +4742,18 @@
       </p:sp>
       <p:sp>
         <p:nvSpPr>
-          <p:cNvPr id="12" name="Rounded Rectangle 11"/>
+          <p:cNvPr id="14" name="Rounded Rectangle 13"/>
           <p:cNvSpPr/>
           <p:nvPr/>
         </p:nvSpPr>
         <p:spPr>
           <a:xfrm>
-            <a:off x="841248" y="3602736"/>
-            <a:ext cx="5715000" cy="530352"/>
+            <a:off x="841248" y="3328416"/>
+            <a:ext cx="5138928" cy="786384"/>
           </a:xfrm>
           <a:prstGeom prst="roundRect">
             <a:avLst>
-              <a:gd name="adj" fmla="val 6000"/>
+              <a:gd name="adj" fmla="val 7000"/>
             </a:avLst>
           </a:prstGeom>
           <a:solidFill>
@@ -4625,9 +4788,55 @@
           </a:p>
         </p:txBody>
       </p:sp>
+      <p:sp>
+        <p:nvSpPr>
+          <p:cNvPr id="15" name="Rounded Rectangle 14"/>
+          <p:cNvSpPr/>
+          <p:nvPr/>
+        </p:nvSpPr>
+        <p:spPr>
+          <a:xfrm>
+            <a:off x="987552" y="3465576"/>
+            <a:ext cx="512064" cy="512064"/>
+          </a:xfrm>
+          <a:prstGeom prst="roundRect">
+            <a:avLst>
+              <a:gd name="adj" fmla="val 26000"/>
+            </a:avLst>
+          </a:prstGeom>
+          <a:solidFill>
+            <a:srgbClr val="EE0000"/>
+          </a:solidFill>
+          <a:ln>
+            <a:noFill/>
+          </a:ln>
+          <a:effectLst/>
+        </p:spPr>
+        <p:style>
+          <a:lnRef idx="1">
+            <a:schemeClr val="accent1"/>
+          </a:lnRef>
+          <a:fillRef idx="3">
+            <a:schemeClr val="accent1"/>
+          </a:fillRef>
+          <a:effectRef idx="2">
+            <a:schemeClr val="accent1"/>
+          </a:effectRef>
+          <a:fontRef idx="minor">
+            <a:schemeClr val="lt1"/>
+          </a:fontRef>
+        </p:style>
+        <p:txBody>
+          <a:bodyPr rtlCol="0" anchor="ctr"/>
+          <a:lstStyle/>
+          <a:p>
+            <a:pPr algn="ctr"/>
+          </a:p>
+        </p:txBody>
+      </p:sp>
       <p:pic>
         <p:nvPicPr>
-          <p:cNvPr id="13" name="Picture 12" descr="check_steel.png"/>
+          <p:cNvPr id="16" name="Picture 15" descr="check_white.png"/>
           <p:cNvPicPr>
             <a:picLocks noChangeAspect="1"/>
           </p:cNvPicPr>
@@ -4641,8 +4850,8 @@
         </p:blipFill>
         <p:spPr>
           <a:xfrm>
-            <a:off x="987552" y="3749040"/>
-            <a:ext cx="237744" cy="237744"/>
+            <a:off x="1110447" y="3588471"/>
+            <a:ext cx="266273" cy="266273"/>
           </a:xfrm>
           <a:prstGeom prst="rect">
             <a:avLst/>
@@ -4651,14 +4860,14 @@
       </p:pic>
       <p:sp>
         <p:nvSpPr>
-          <p:cNvPr id="14" name="TextBox 13"/>
+          <p:cNvPr id="17" name="TextBox 16"/>
           <p:cNvSpPr txBox="1"/>
           <p:nvPr/>
         </p:nvSpPr>
         <p:spPr>
           <a:xfrm>
-            <a:off x="1353312" y="3602736"/>
-            <a:ext cx="5029200" cy="530352"/>
+            <a:off x="1627632" y="3328416"/>
+            <a:ext cx="4206240" cy="786384"/>
           </a:xfrm>
           <a:prstGeom prst="rect">
             <a:avLst/>
@@ -4683,7 +4892,7 @@
               </a:spcAft>
             </a:pPr>
             <a:r>
-              <a:rPr sz="1200" b="0">
+              <a:rPr sz="1150" b="0">
                 <a:solidFill>
                   <a:srgbClr val="1A1A1A"/>
                 </a:solidFill>
@@ -4696,18 +4905,18 @@
       </p:sp>
       <p:sp>
         <p:nvSpPr>
-          <p:cNvPr id="15" name="Rounded Rectangle 14"/>
+          <p:cNvPr id="18" name="Rounded Rectangle 17"/>
           <p:cNvSpPr/>
           <p:nvPr/>
         </p:nvSpPr>
         <p:spPr>
           <a:xfrm>
-            <a:off x="841248" y="4206240"/>
-            <a:ext cx="5715000" cy="530352"/>
+            <a:off x="6254496" y="3328416"/>
+            <a:ext cx="5138928" cy="786384"/>
           </a:xfrm>
           <a:prstGeom prst="roundRect">
             <a:avLst>
-              <a:gd name="adj" fmla="val 6000"/>
+              <a:gd name="adj" fmla="val 7000"/>
             </a:avLst>
           </a:prstGeom>
           <a:solidFill>
@@ -4742,9 +4951,55 @@
           </a:p>
         </p:txBody>
       </p:sp>
+      <p:sp>
+        <p:nvSpPr>
+          <p:cNvPr id="19" name="Rounded Rectangle 18"/>
+          <p:cNvSpPr/>
+          <p:nvPr/>
+        </p:nvSpPr>
+        <p:spPr>
+          <a:xfrm>
+            <a:off x="6400800" y="3465576"/>
+            <a:ext cx="512064" cy="512064"/>
+          </a:xfrm>
+          <a:prstGeom prst="roundRect">
+            <a:avLst>
+              <a:gd name="adj" fmla="val 26000"/>
+            </a:avLst>
+          </a:prstGeom>
+          <a:solidFill>
+            <a:srgbClr val="EE0000"/>
+          </a:solidFill>
+          <a:ln>
+            <a:noFill/>
+          </a:ln>
+          <a:effectLst/>
+        </p:spPr>
+        <p:style>
+          <a:lnRef idx="1">
+            <a:schemeClr val="accent1"/>
+          </a:lnRef>
+          <a:fillRef idx="3">
+            <a:schemeClr val="accent1"/>
+          </a:fillRef>
+          <a:effectRef idx="2">
+            <a:schemeClr val="accent1"/>
+          </a:effectRef>
+          <a:fontRef idx="minor">
+            <a:schemeClr val="lt1"/>
+          </a:fontRef>
+        </p:style>
+        <p:txBody>
+          <a:bodyPr rtlCol="0" anchor="ctr"/>
+          <a:lstStyle/>
+          <a:p>
+            <a:pPr algn="ctr"/>
+          </a:p>
+        </p:txBody>
+      </p:sp>
       <p:pic>
         <p:nvPicPr>
-          <p:cNvPr id="16" name="Picture 15" descr="check_steel.png"/>
+          <p:cNvPr id="20" name="Picture 19" descr="check_white.png"/>
           <p:cNvPicPr>
             <a:picLocks noChangeAspect="1"/>
           </p:cNvPicPr>
@@ -4758,8 +5013,8 @@
         </p:blipFill>
         <p:spPr>
           <a:xfrm>
-            <a:off x="987552" y="4352544"/>
-            <a:ext cx="237744" cy="237744"/>
+            <a:off x="6523695" y="3588471"/>
+            <a:ext cx="266273" cy="266273"/>
           </a:xfrm>
           <a:prstGeom prst="rect">
             <a:avLst/>
@@ -4768,14 +5023,14 @@
       </p:pic>
       <p:sp>
         <p:nvSpPr>
-          <p:cNvPr id="17" name="TextBox 16"/>
+          <p:cNvPr id="21" name="TextBox 20"/>
           <p:cNvSpPr txBox="1"/>
           <p:nvPr/>
         </p:nvSpPr>
         <p:spPr>
           <a:xfrm>
-            <a:off x="1353312" y="4206240"/>
-            <a:ext cx="5029200" cy="530352"/>
+            <a:off x="7040880" y="3328416"/>
+            <a:ext cx="4206240" cy="786384"/>
           </a:xfrm>
           <a:prstGeom prst="rect">
             <a:avLst/>
@@ -4800,7 +5055,7 @@
               </a:spcAft>
             </a:pPr>
             <a:r>
-              <a:rPr sz="1200" b="0">
+              <a:rPr sz="1150" b="0">
                 <a:solidFill>
                   <a:srgbClr val="1A1A1A"/>
                 </a:solidFill>
@@ -4813,18 +5068,18 @@
       </p:sp>
       <p:sp>
         <p:nvSpPr>
-          <p:cNvPr id="18" name="Rounded Rectangle 17"/>
+          <p:cNvPr id="22" name="Rounded Rectangle 21"/>
           <p:cNvSpPr/>
           <p:nvPr/>
         </p:nvSpPr>
         <p:spPr>
           <a:xfrm>
-            <a:off x="841248" y="4809744"/>
-            <a:ext cx="5715000" cy="530352"/>
+            <a:off x="841248" y="4261104"/>
+            <a:ext cx="5138928" cy="786384"/>
           </a:xfrm>
           <a:prstGeom prst="roundRect">
             <a:avLst>
-              <a:gd name="adj" fmla="val 6000"/>
+              <a:gd name="adj" fmla="val 7000"/>
             </a:avLst>
           </a:prstGeom>
           <a:solidFill>
@@ -4859,9 +5114,55 @@
           </a:p>
         </p:txBody>
       </p:sp>
+      <p:sp>
+        <p:nvSpPr>
+          <p:cNvPr id="23" name="Rounded Rectangle 22"/>
+          <p:cNvSpPr/>
+          <p:nvPr/>
+        </p:nvSpPr>
+        <p:spPr>
+          <a:xfrm>
+            <a:off x="987552" y="4398264"/>
+            <a:ext cx="512064" cy="512064"/>
+          </a:xfrm>
+          <a:prstGeom prst="roundRect">
+            <a:avLst>
+              <a:gd name="adj" fmla="val 26000"/>
+            </a:avLst>
+          </a:prstGeom>
+          <a:solidFill>
+            <a:srgbClr val="EE0000"/>
+          </a:solidFill>
+          <a:ln>
+            <a:noFill/>
+          </a:ln>
+          <a:effectLst/>
+        </p:spPr>
+        <p:style>
+          <a:lnRef idx="1">
+            <a:schemeClr val="accent1"/>
+          </a:lnRef>
+          <a:fillRef idx="3">
+            <a:schemeClr val="accent1"/>
+          </a:fillRef>
+          <a:effectRef idx="2">
+            <a:schemeClr val="accent1"/>
+          </a:effectRef>
+          <a:fontRef idx="minor">
+            <a:schemeClr val="lt1"/>
+          </a:fontRef>
+        </p:style>
+        <p:txBody>
+          <a:bodyPr rtlCol="0" anchor="ctr"/>
+          <a:lstStyle/>
+          <a:p>
+            <a:pPr algn="ctr"/>
+          </a:p>
+        </p:txBody>
+      </p:sp>
       <p:pic>
         <p:nvPicPr>
-          <p:cNvPr id="19" name="Picture 18" descr="check_steel.png"/>
+          <p:cNvPr id="24" name="Picture 23" descr="check_white.png"/>
           <p:cNvPicPr>
             <a:picLocks noChangeAspect="1"/>
           </p:cNvPicPr>
@@ -4875,8 +5176,8 @@
         </p:blipFill>
         <p:spPr>
           <a:xfrm>
-            <a:off x="987552" y="4956048"/>
-            <a:ext cx="237744" cy="237744"/>
+            <a:off x="1110447" y="4521159"/>
+            <a:ext cx="266273" cy="266273"/>
           </a:xfrm>
           <a:prstGeom prst="rect">
             <a:avLst/>
@@ -4885,14 +5186,14 @@
       </p:pic>
       <p:sp>
         <p:nvSpPr>
-          <p:cNvPr id="20" name="TextBox 19"/>
+          <p:cNvPr id="25" name="TextBox 24"/>
           <p:cNvSpPr txBox="1"/>
           <p:nvPr/>
         </p:nvSpPr>
         <p:spPr>
           <a:xfrm>
-            <a:off x="1353312" y="4809744"/>
-            <a:ext cx="5029200" cy="530352"/>
+            <a:off x="1627632" y="4261104"/>
+            <a:ext cx="4206240" cy="786384"/>
           </a:xfrm>
           <a:prstGeom prst="rect">
             <a:avLst/>
@@ -4917,221 +5218,13 @@
               </a:spcAft>
             </a:pPr>
             <a:r>
-              <a:rPr sz="1200" b="0">
+              <a:rPr sz="1150" b="0">
                 <a:solidFill>
                   <a:srgbClr val="1A1A1A"/>
                 </a:solidFill>
                 <a:latin typeface="Red Hat Text"/>
               </a:rPr>
               <a:t>The choice is a folder of YAML vs a versioned artifact</a:t>
-            </a:r>
-          </a:p>
-        </p:txBody>
-      </p:sp>
-      <p:sp>
-        <p:nvSpPr>
-          <p:cNvPr id="21" name="Rounded Rectangle 20"/>
-          <p:cNvSpPr/>
-          <p:nvPr/>
-        </p:nvSpPr>
-        <p:spPr>
-          <a:xfrm>
-            <a:off x="6812280" y="2395728"/>
-            <a:ext cx="4538167" cy="2944368"/>
-          </a:xfrm>
-          <a:prstGeom prst="roundRect">
-            <a:avLst>
-              <a:gd name="adj" fmla="val 4000"/>
-            </a:avLst>
-          </a:prstGeom>
-          <a:solidFill>
-            <a:srgbClr val="FFFFFF"/>
-          </a:solidFill>
-          <a:ln w="15240">
-            <a:solidFill>
-              <a:srgbClr val="DDE1E6"/>
-            </a:solidFill>
-          </a:ln>
-          <a:effectLst/>
-        </p:spPr>
-        <p:style>
-          <a:lnRef idx="1">
-            <a:schemeClr val="accent1"/>
-          </a:lnRef>
-          <a:fillRef idx="3">
-            <a:schemeClr val="accent1"/>
-          </a:fillRef>
-          <a:effectRef idx="2">
-            <a:schemeClr val="accent1"/>
-          </a:effectRef>
-          <a:fontRef idx="minor">
-            <a:schemeClr val="lt1"/>
-          </a:fontRef>
-        </p:style>
-        <p:txBody>
-          <a:bodyPr rtlCol="0" anchor="ctr"/>
-          <a:lstStyle/>
-          <a:p>
-            <a:pPr algn="ctr"/>
-          </a:p>
-        </p:txBody>
-      </p:sp>
-      <p:sp>
-        <p:nvSpPr>
-          <p:cNvPr id="22" name="Rounded Rectangle 21"/>
-          <p:cNvSpPr/>
-          <p:nvPr/>
-        </p:nvSpPr>
-        <p:spPr>
-          <a:xfrm>
-            <a:off x="7013448" y="2596896"/>
-            <a:ext cx="1298448" cy="310896"/>
-          </a:xfrm>
-          <a:prstGeom prst="roundRect">
-            <a:avLst>
-              <a:gd name="adj" fmla="val 50000"/>
-            </a:avLst>
-          </a:prstGeom>
-          <a:solidFill>
-            <a:srgbClr val="FCECEC"/>
-          </a:solidFill>
-          <a:ln>
-            <a:noFill/>
-          </a:ln>
-          <a:effectLst/>
-        </p:spPr>
-        <p:style>
-          <a:lnRef idx="1">
-            <a:schemeClr val="accent1"/>
-          </a:lnRef>
-          <a:fillRef idx="3">
-            <a:schemeClr val="accent1"/>
-          </a:fillRef>
-          <a:effectRef idx="2">
-            <a:schemeClr val="accent1"/>
-          </a:effectRef>
-          <a:fontRef idx="minor">
-            <a:schemeClr val="lt1"/>
-          </a:fontRef>
-        </p:style>
-        <p:txBody>
-          <a:bodyPr rtlCol="0" anchor="ctr"/>
-          <a:lstStyle/>
-          <a:p>
-            <a:pPr algn="ctr"/>
-          </a:p>
-        </p:txBody>
-      </p:sp>
-      <p:sp>
-        <p:nvSpPr>
-          <p:cNvPr id="23" name="TextBox 22"/>
-          <p:cNvSpPr txBox="1"/>
-          <p:nvPr/>
-        </p:nvSpPr>
-        <p:spPr>
-          <a:xfrm>
-            <a:off x="7013448" y="2596896"/>
-            <a:ext cx="1298448" cy="310896"/>
-          </a:xfrm>
-          <a:prstGeom prst="rect">
-            <a:avLst/>
-          </a:prstGeom>
-          <a:noFill/>
-        </p:spPr>
-        <p:txBody>
-          <a:bodyPr wrap="none" anchor="ctr" lIns="0" rIns="0" tIns="0" bIns="0">
-            <a:spAutoFit/>
-          </a:bodyPr>
-          <a:lstStyle/>
-          <a:p>
-            <a:pPr algn="ctr">
-              <a:lnSpc>
-                <a:spcPct val="106000"/>
-              </a:lnSpc>
-              <a:spcBef>
-                <a:spcPts val="0"/>
-              </a:spcBef>
-              <a:spcAft>
-                <a:spcPts val="0"/>
-              </a:spcAft>
-            </a:pPr>
-            <a:r>
-              <a:rPr sz="850" b="1">
-                <a:solidFill>
-                  <a:srgbClr val="B80000"/>
-                </a:solidFill>
-                <a:latin typeface="Red Hat Display"/>
-              </a:rPr>
-              <a:t>MEDIA PASS</a:t>
-            </a:r>
-          </a:p>
-        </p:txBody>
-      </p:sp>
-      <p:pic>
-        <p:nvPicPr>
-          <p:cNvPr id="24" name="Picture 23" descr="eye_slate.png"/>
-          <p:cNvPicPr>
-            <a:picLocks noChangeAspect="1"/>
-          </p:cNvPicPr>
-          <p:nvPr/>
-        </p:nvPicPr>
-        <p:blipFill>
-          <a:blip r:embed="rId4"/>
-          <a:stretch>
-            <a:fillRect/>
-          </a:stretch>
-        </p:blipFill>
-        <p:spPr>
-          <a:xfrm>
-            <a:off x="8843619" y="3108960"/>
-            <a:ext cx="475488" cy="475488"/>
-          </a:xfrm>
-          <a:prstGeom prst="rect">
-            <a:avLst/>
-          </a:prstGeom>
-        </p:spPr>
-      </p:pic>
-      <p:sp>
-        <p:nvSpPr>
-          <p:cNvPr id="25" name="TextBox 24"/>
-          <p:cNvSpPr txBox="1"/>
-          <p:nvPr/>
-        </p:nvSpPr>
-        <p:spPr>
-          <a:xfrm>
-            <a:off x="7050024" y="3721608"/>
-            <a:ext cx="4062679" cy="1481328"/>
-          </a:xfrm>
-          <a:prstGeom prst="rect">
-            <a:avLst/>
-          </a:prstGeom>
-          <a:noFill/>
-        </p:spPr>
-        <p:txBody>
-          <a:bodyPr wrap="square" anchor="t" lIns="0" rIns="0" tIns="0" bIns="0">
-            <a:spAutoFit/>
-          </a:bodyPr>
-          <a:lstStyle/>
-          <a:p>
-            <a:pPr algn="l">
-              <a:lnSpc>
-                <a:spcPct val="120000"/>
-              </a:lnSpc>
-              <a:spcBef>
-                <a:spcPts val="0"/>
-              </a:spcBef>
-              <a:spcAft>
-                <a:spcPts val="0"/>
-              </a:spcAft>
-            </a:pPr>
-            <a:r>
-              <a:rPr sz="950" b="0">
-                <a:solidFill>
-                  <a:srgbClr val="8A9099"/>
-                </a:solidFill>
-                <a:latin typeface="Red Hat Text"/>
-              </a:rPr>
-              <a:t>A split — left: a messy folder of YAML files with a shrug ("which version is in prod?"); right: a single versioned chart artifact with install/upgrade/rollback buttons. Arrow labeled "package it once."</a:t>
             </a:r>
           </a:p>
         </p:txBody>
@@ -5484,7 +5577,7 @@
         <p:spPr>
           <a:xfrm>
             <a:off x="841248" y="2670048"/>
-            <a:ext cx="5715000" cy="530352"/>
+            <a:ext cx="4160520" cy="475488"/>
           </a:xfrm>
           <a:prstGeom prst="roundRect">
             <a:avLst>
@@ -5539,8 +5632,8 @@
         </p:blipFill>
         <p:spPr>
           <a:xfrm>
-            <a:off x="987552" y="2816352"/>
-            <a:ext cx="237744" cy="237744"/>
+            <a:off x="969264" y="2807208"/>
+            <a:ext cx="201168" cy="201168"/>
           </a:xfrm>
           <a:prstGeom prst="rect">
             <a:avLst/>
@@ -5555,8 +5648,8 @@
         </p:nvSpPr>
         <p:spPr>
           <a:xfrm>
-            <a:off x="1353312" y="2670048"/>
-            <a:ext cx="5029200" cy="530352"/>
+            <a:off x="1280160" y="2670048"/>
+            <a:ext cx="3593591" cy="475488"/>
           </a:xfrm>
           <a:prstGeom prst="rect">
             <a:avLst/>
@@ -5581,7 +5674,7 @@
               </a:spcAft>
             </a:pPr>
             <a:r>
-              <a:rPr sz="1200" b="0">
+              <a:rPr sz="1050" b="0">
                 <a:solidFill>
                   <a:srgbClr val="1A1A1A"/>
                 </a:solidFill>
@@ -5600,8 +5693,8 @@
         </p:nvSpPr>
         <p:spPr>
           <a:xfrm>
-            <a:off x="841248" y="3273552"/>
-            <a:ext cx="5715000" cy="530352"/>
+            <a:off x="841248" y="3218688"/>
+            <a:ext cx="4160520" cy="475488"/>
           </a:xfrm>
           <a:prstGeom prst="roundRect">
             <a:avLst>
@@ -5656,8 +5749,8 @@
         </p:blipFill>
         <p:spPr>
           <a:xfrm>
-            <a:off x="987552" y="3419856"/>
-            <a:ext cx="237744" cy="237744"/>
+            <a:off x="969264" y="3355848"/>
+            <a:ext cx="201168" cy="201168"/>
           </a:xfrm>
           <a:prstGeom prst="rect">
             <a:avLst/>
@@ -5672,8 +5765,8 @@
         </p:nvSpPr>
         <p:spPr>
           <a:xfrm>
-            <a:off x="1353312" y="3273552"/>
-            <a:ext cx="5029200" cy="530352"/>
+            <a:off x="1280160" y="3218688"/>
+            <a:ext cx="3593591" cy="475488"/>
           </a:xfrm>
           <a:prstGeom prst="rect">
             <a:avLst/>
@@ -5698,7 +5791,7 @@
               </a:spcAft>
             </a:pPr>
             <a:r>
-              <a:rPr sz="1200" b="0">
+              <a:rPr sz="1050" b="0">
                 <a:solidFill>
                   <a:srgbClr val="1A1A1A"/>
                 </a:solidFill>
@@ -5717,8 +5810,8 @@
         </p:nvSpPr>
         <p:spPr>
           <a:xfrm>
-            <a:off x="841248" y="3877056"/>
-            <a:ext cx="5715000" cy="530352"/>
+            <a:off x="841248" y="3767328"/>
+            <a:ext cx="4160520" cy="475488"/>
           </a:xfrm>
           <a:prstGeom prst="roundRect">
             <a:avLst>
@@ -5773,8 +5866,8 @@
         </p:blipFill>
         <p:spPr>
           <a:xfrm>
-            <a:off x="987552" y="4023360"/>
-            <a:ext cx="237744" cy="237744"/>
+            <a:off x="969264" y="3904487"/>
+            <a:ext cx="201168" cy="201168"/>
           </a:xfrm>
           <a:prstGeom prst="rect">
             <a:avLst/>
@@ -5789,8 +5882,8 @@
         </p:nvSpPr>
         <p:spPr>
           <a:xfrm>
-            <a:off x="1353312" y="3877056"/>
-            <a:ext cx="5029200" cy="530352"/>
+            <a:off x="1280160" y="3767328"/>
+            <a:ext cx="3593591" cy="475488"/>
           </a:xfrm>
           <a:prstGeom prst="rect">
             <a:avLst/>
@@ -5815,7 +5908,7 @@
               </a:spcAft>
             </a:pPr>
             <a:r>
-              <a:rPr sz="1200" b="0">
+              <a:rPr sz="1050" b="0">
                 <a:solidFill>
                   <a:srgbClr val="1A1A1A"/>
                 </a:solidFill>
@@ -5834,8 +5927,8 @@
         </p:nvSpPr>
         <p:spPr>
           <a:xfrm>
-            <a:off x="841248" y="4480560"/>
-            <a:ext cx="5715000" cy="530352"/>
+            <a:off x="841248" y="4315968"/>
+            <a:ext cx="4160520" cy="475488"/>
           </a:xfrm>
           <a:prstGeom prst="roundRect">
             <a:avLst>
@@ -5890,8 +5983,8 @@
         </p:blipFill>
         <p:spPr>
           <a:xfrm>
-            <a:off x="987552" y="4626864"/>
-            <a:ext cx="237744" cy="237744"/>
+            <a:off x="969264" y="4453127"/>
+            <a:ext cx="201168" cy="201168"/>
           </a:xfrm>
           <a:prstGeom prst="rect">
             <a:avLst/>
@@ -5906,8 +5999,8 @@
         </p:nvSpPr>
         <p:spPr>
           <a:xfrm>
-            <a:off x="1353312" y="4480560"/>
-            <a:ext cx="5029200" cy="530352"/>
+            <a:off x="1280160" y="4315968"/>
+            <a:ext cx="3593591" cy="475488"/>
           </a:xfrm>
           <a:prstGeom prst="rect">
             <a:avLst/>
@@ -5932,7 +6025,7 @@
               </a:spcAft>
             </a:pPr>
             <a:r>
-              <a:rPr sz="1200" b="0">
+              <a:rPr sz="1050" b="0">
                 <a:solidFill>
                   <a:srgbClr val="1A1A1A"/>
                 </a:solidFill>
@@ -5951,8 +6044,8 @@
         </p:nvSpPr>
         <p:spPr>
           <a:xfrm>
-            <a:off x="841248" y="5084064"/>
-            <a:ext cx="5715000" cy="530352"/>
+            <a:off x="841248" y="4864607"/>
+            <a:ext cx="4160520" cy="475488"/>
           </a:xfrm>
           <a:prstGeom prst="roundRect">
             <a:avLst>
@@ -6007,8 +6100,8 @@
         </p:blipFill>
         <p:spPr>
           <a:xfrm>
-            <a:off x="987552" y="5230368"/>
-            <a:ext cx="237744" cy="237744"/>
+            <a:off x="969264" y="5001767"/>
+            <a:ext cx="201168" cy="201168"/>
           </a:xfrm>
           <a:prstGeom prst="rect">
             <a:avLst/>
@@ -6023,8 +6116,8 @@
         </p:nvSpPr>
         <p:spPr>
           <a:xfrm>
-            <a:off x="1353312" y="5084064"/>
-            <a:ext cx="5029200" cy="530352"/>
+            <a:off x="1280160" y="4864607"/>
+            <a:ext cx="3593591" cy="475488"/>
           </a:xfrm>
           <a:prstGeom prst="rect">
             <a:avLst/>
@@ -6049,7 +6142,7 @@
               </a:spcAft>
             </a:pPr>
             <a:r>
-              <a:rPr sz="1200" b="0">
+              <a:rPr sz="1050" b="0">
                 <a:solidFill>
                   <a:srgbClr val="1A1A1A"/>
                 </a:solidFill>
@@ -6068,8 +6161,8 @@
         </p:nvSpPr>
         <p:spPr>
           <a:xfrm>
-            <a:off x="6812280" y="2670048"/>
-            <a:ext cx="4538167" cy="2944368"/>
+            <a:off x="5385816" y="3595790"/>
+            <a:ext cx="5964631" cy="891715"/>
           </a:xfrm>
           <a:prstGeom prst="roundRect">
             <a:avLst>
@@ -6108,100 +6201,9 @@
           </a:p>
         </p:txBody>
       </p:sp>
-      <p:sp>
-        <p:nvSpPr>
-          <p:cNvPr id="23" name="Rounded Rectangle 22"/>
-          <p:cNvSpPr/>
-          <p:nvPr/>
-        </p:nvSpPr>
-        <p:spPr>
-          <a:xfrm>
-            <a:off x="7013448" y="2871216"/>
-            <a:ext cx="1298448" cy="310896"/>
-          </a:xfrm>
-          <a:prstGeom prst="roundRect">
-            <a:avLst>
-              <a:gd name="adj" fmla="val 50000"/>
-            </a:avLst>
-          </a:prstGeom>
-          <a:solidFill>
-            <a:srgbClr val="FCECEC"/>
-          </a:solidFill>
-          <a:ln>
-            <a:noFill/>
-          </a:ln>
-          <a:effectLst/>
-        </p:spPr>
-        <p:style>
-          <a:lnRef idx="1">
-            <a:schemeClr val="accent1"/>
-          </a:lnRef>
-          <a:fillRef idx="3">
-            <a:schemeClr val="accent1"/>
-          </a:fillRef>
-          <a:effectRef idx="2">
-            <a:schemeClr val="accent1"/>
-          </a:effectRef>
-          <a:fontRef idx="minor">
-            <a:schemeClr val="lt1"/>
-          </a:fontRef>
-        </p:style>
-        <p:txBody>
-          <a:bodyPr rtlCol="0" anchor="ctr"/>
-          <a:lstStyle/>
-          <a:p>
-            <a:pPr algn="ctr"/>
-          </a:p>
-        </p:txBody>
-      </p:sp>
-      <p:sp>
-        <p:nvSpPr>
-          <p:cNvPr id="24" name="TextBox 23"/>
-          <p:cNvSpPr txBox="1"/>
-          <p:nvPr/>
-        </p:nvSpPr>
-        <p:spPr>
-          <a:xfrm>
-            <a:off x="7013448" y="2871216"/>
-            <a:ext cx="1298448" cy="310896"/>
-          </a:xfrm>
-          <a:prstGeom prst="rect">
-            <a:avLst/>
-          </a:prstGeom>
-          <a:noFill/>
-        </p:spPr>
-        <p:txBody>
-          <a:bodyPr wrap="none" anchor="ctr" lIns="0" rIns="0" tIns="0" bIns="0">
-            <a:spAutoFit/>
-          </a:bodyPr>
-          <a:lstStyle/>
-          <a:p>
-            <a:pPr algn="ctr">
-              <a:lnSpc>
-                <a:spcPct val="106000"/>
-              </a:lnSpc>
-              <a:spcBef>
-                <a:spcPts val="0"/>
-              </a:spcBef>
-              <a:spcAft>
-                <a:spcPts val="0"/>
-              </a:spcAft>
-            </a:pPr>
-            <a:r>
-              <a:rPr sz="850" b="1">
-                <a:solidFill>
-                  <a:srgbClr val="B80000"/>
-                </a:solidFill>
-                <a:latin typeface="Red Hat Display"/>
-              </a:rPr>
-              <a:t>MEDIA PASS</a:t>
-            </a:r>
-          </a:p>
-        </p:txBody>
-      </p:sp>
       <p:pic>
         <p:nvPicPr>
-          <p:cNvPr id="25" name="Picture 24" descr="eye_slate.png"/>
+          <p:cNvPr id="23" name="Picture 22" descr="01-spectrum.png"/>
           <p:cNvPicPr>
             <a:picLocks noChangeAspect="1"/>
           </p:cNvPicPr>
@@ -6215,62 +6217,17 @@
         </p:blipFill>
         <p:spPr>
           <a:xfrm>
-            <a:off x="8843619" y="3383280"/>
-            <a:ext cx="475488" cy="475488"/>
+            <a:off x="5532120" y="3742094"/>
+            <a:ext cx="5672023" cy="599107"/>
           </a:xfrm>
           <a:prstGeom prst="rect">
             <a:avLst/>
           </a:prstGeom>
         </p:spPr>
       </p:pic>
-      <p:sp>
-        <p:nvSpPr>
-          <p:cNvPr id="26" name="TextBox 25"/>
-          <p:cNvSpPr txBox="1"/>
-          <p:nvPr/>
-        </p:nvSpPr>
-        <p:spPr>
-          <a:xfrm>
-            <a:off x="7050024" y="3995928"/>
-            <a:ext cx="4062679" cy="1481328"/>
-          </a:xfrm>
-          <a:prstGeom prst="rect">
-            <a:avLst/>
-          </a:prstGeom>
-          <a:noFill/>
-        </p:spPr>
-        <p:txBody>
-          <a:bodyPr wrap="square" anchor="t" lIns="0" rIns="0" tIns="0" bIns="0">
-            <a:spAutoFit/>
-          </a:bodyPr>
-          <a:lstStyle/>
-          <a:p>
-            <a:pPr algn="l">
-              <a:lnSpc>
-                <a:spcPct val="120000"/>
-              </a:lnSpc>
-              <a:spcBef>
-                <a:spcPts val="0"/>
-              </a:spcBef>
-              <a:spcAft>
-                <a:spcPts val="0"/>
-              </a:spcAft>
-            </a:pPr>
-            <a:r>
-              <a:rPr sz="950" b="0">
-                <a:solidFill>
-                  <a:srgbClr val="8A9099"/>
-                </a:solidFill>
-                <a:latin typeface="Red Hat Text"/>
-              </a:rPr>
-              <a:t>Reuse concept diagram packaging-distributing-...-01-spectrum.svg — five stops left to right (manifests → Template → Kustomize → Helm → Operator) on a "day-2 encoded in the package →" axis, Helm highlighted green as the focus, Operator amber as "high cost."</a:t>
-            </a:r>
-          </a:p>
-        </p:txBody>
-      </p:sp>
       <p:cxnSp>
         <p:nvCxnSpPr>
-          <p:cNvPr id="27" name="Connector 26"/>
+          <p:cNvPr id="24" name="Connector 23"/>
           <p:cNvCxnSpPr/>
           <p:nvPr/>
         </p:nvCxnSpPr>
@@ -6306,7 +6263,7 @@
       </p:cxnSp>
       <p:sp>
         <p:nvSpPr>
-          <p:cNvPr id="28" name="TextBox 27"/>
+          <p:cNvPr id="25" name="TextBox 24"/>
           <p:cNvSpPr txBox="1"/>
           <p:nvPr/>
         </p:nvSpPr>
@@ -6351,7 +6308,7 @@
       </p:sp>
       <p:sp>
         <p:nvSpPr>
-          <p:cNvPr id="29" name="TextBox 28"/>
+          <p:cNvPr id="26" name="TextBox 25"/>
           <p:cNvSpPr txBox="1"/>
           <p:nvPr/>
         </p:nvSpPr>
@@ -6616,11 +6573,11 @@
         <p:spPr>
           <a:xfrm>
             <a:off x="841248" y="2670048"/>
-            <a:ext cx="5715000" cy="530352"/>
+            <a:ext cx="5138928" cy="786384"/>
           </a:xfrm>
           <a:prstGeom prst="roundRect">
             <a:avLst>
-              <a:gd name="adj" fmla="val 6000"/>
+              <a:gd name="adj" fmla="val 7000"/>
             </a:avLst>
           </a:prstGeom>
           <a:solidFill>
@@ -6655,9 +6612,55 @@
           </a:p>
         </p:txBody>
       </p:sp>
+      <p:sp>
+        <p:nvSpPr>
+          <p:cNvPr id="8" name="Rounded Rectangle 7"/>
+          <p:cNvSpPr/>
+          <p:nvPr/>
+        </p:nvSpPr>
+        <p:spPr>
+          <a:xfrm>
+            <a:off x="987552" y="2807208"/>
+            <a:ext cx="512064" cy="512064"/>
+          </a:xfrm>
+          <a:prstGeom prst="roundRect">
+            <a:avLst>
+              <a:gd name="adj" fmla="val 26000"/>
+            </a:avLst>
+          </a:prstGeom>
+          <a:solidFill>
+            <a:srgbClr val="EE0000"/>
+          </a:solidFill>
+          <a:ln>
+            <a:noFill/>
+          </a:ln>
+          <a:effectLst/>
+        </p:spPr>
+        <p:style>
+          <a:lnRef idx="1">
+            <a:schemeClr val="accent1"/>
+          </a:lnRef>
+          <a:fillRef idx="3">
+            <a:schemeClr val="accent1"/>
+          </a:fillRef>
+          <a:effectRef idx="2">
+            <a:schemeClr val="accent1"/>
+          </a:effectRef>
+          <a:fontRef idx="minor">
+            <a:schemeClr val="lt1"/>
+          </a:fontRef>
+        </p:style>
+        <p:txBody>
+          <a:bodyPr rtlCol="0" anchor="ctr"/>
+          <a:lstStyle/>
+          <a:p>
+            <a:pPr algn="ctr"/>
+          </a:p>
+        </p:txBody>
+      </p:sp>
       <p:pic>
         <p:nvPicPr>
-          <p:cNvPr id="8" name="Picture 7" descr="check_steel.png"/>
+          <p:cNvPr id="9" name="Picture 8" descr="check_white.png"/>
           <p:cNvPicPr>
             <a:picLocks noChangeAspect="1"/>
           </p:cNvPicPr>
@@ -6671,8 +6674,8 @@
         </p:blipFill>
         <p:spPr>
           <a:xfrm>
-            <a:off x="987552" y="2816352"/>
-            <a:ext cx="237744" cy="237744"/>
+            <a:off x="1110447" y="2930103"/>
+            <a:ext cx="266273" cy="266273"/>
           </a:xfrm>
           <a:prstGeom prst="rect">
             <a:avLst/>
@@ -6681,14 +6684,14 @@
       </p:pic>
       <p:sp>
         <p:nvSpPr>
-          <p:cNvPr id="9" name="TextBox 8"/>
+          <p:cNvPr id="10" name="TextBox 9"/>
           <p:cNvSpPr txBox="1"/>
           <p:nvPr/>
         </p:nvSpPr>
         <p:spPr>
           <a:xfrm>
-            <a:off x="1353312" y="2670048"/>
-            <a:ext cx="5029200" cy="530352"/>
+            <a:off x="1627632" y="2670048"/>
+            <a:ext cx="4206240" cy="786384"/>
           </a:xfrm>
           <a:prstGeom prst="rect">
             <a:avLst/>
@@ -6713,7 +6716,7 @@
               </a:spcAft>
             </a:pPr>
             <a:r>
-              <a:rPr sz="1200" b="0">
+              <a:rPr sz="1150" b="0">
                 <a:solidFill>
                   <a:srgbClr val="1A1A1A"/>
                 </a:solidFill>
@@ -6726,18 +6729,18 @@
       </p:sp>
       <p:sp>
         <p:nvSpPr>
-          <p:cNvPr id="10" name="Rounded Rectangle 9"/>
+          <p:cNvPr id="11" name="Rounded Rectangle 10"/>
           <p:cNvSpPr/>
           <p:nvPr/>
         </p:nvSpPr>
         <p:spPr>
           <a:xfrm>
-            <a:off x="841248" y="3273552"/>
-            <a:ext cx="5715000" cy="530352"/>
+            <a:off x="6254496" y="2670048"/>
+            <a:ext cx="5138928" cy="786384"/>
           </a:xfrm>
           <a:prstGeom prst="roundRect">
             <a:avLst>
-              <a:gd name="adj" fmla="val 6000"/>
+              <a:gd name="adj" fmla="val 7000"/>
             </a:avLst>
           </a:prstGeom>
           <a:solidFill>
@@ -6772,9 +6775,55 @@
           </a:p>
         </p:txBody>
       </p:sp>
+      <p:sp>
+        <p:nvSpPr>
+          <p:cNvPr id="12" name="Rounded Rectangle 11"/>
+          <p:cNvSpPr/>
+          <p:nvPr/>
+        </p:nvSpPr>
+        <p:spPr>
+          <a:xfrm>
+            <a:off x="6400800" y="2807208"/>
+            <a:ext cx="512064" cy="512064"/>
+          </a:xfrm>
+          <a:prstGeom prst="roundRect">
+            <a:avLst>
+              <a:gd name="adj" fmla="val 26000"/>
+            </a:avLst>
+          </a:prstGeom>
+          <a:solidFill>
+            <a:srgbClr val="EE0000"/>
+          </a:solidFill>
+          <a:ln>
+            <a:noFill/>
+          </a:ln>
+          <a:effectLst/>
+        </p:spPr>
+        <p:style>
+          <a:lnRef idx="1">
+            <a:schemeClr val="accent1"/>
+          </a:lnRef>
+          <a:fillRef idx="3">
+            <a:schemeClr val="accent1"/>
+          </a:fillRef>
+          <a:effectRef idx="2">
+            <a:schemeClr val="accent1"/>
+          </a:effectRef>
+          <a:fontRef idx="minor">
+            <a:schemeClr val="lt1"/>
+          </a:fontRef>
+        </p:style>
+        <p:txBody>
+          <a:bodyPr rtlCol="0" anchor="ctr"/>
+          <a:lstStyle/>
+          <a:p>
+            <a:pPr algn="ctr"/>
+          </a:p>
+        </p:txBody>
+      </p:sp>
       <p:pic>
         <p:nvPicPr>
-          <p:cNvPr id="11" name="Picture 10" descr="check_steel.png"/>
+          <p:cNvPr id="13" name="Picture 12" descr="check_white.png"/>
           <p:cNvPicPr>
             <a:picLocks noChangeAspect="1"/>
           </p:cNvPicPr>
@@ -6788,8 +6837,8 @@
         </p:blipFill>
         <p:spPr>
           <a:xfrm>
-            <a:off x="987552" y="3419856"/>
-            <a:ext cx="237744" cy="237744"/>
+            <a:off x="6523695" y="2930103"/>
+            <a:ext cx="266273" cy="266273"/>
           </a:xfrm>
           <a:prstGeom prst="rect">
             <a:avLst/>
@@ -6798,14 +6847,14 @@
       </p:pic>
       <p:sp>
         <p:nvSpPr>
-          <p:cNvPr id="12" name="TextBox 11"/>
+          <p:cNvPr id="14" name="TextBox 13"/>
           <p:cNvSpPr txBox="1"/>
           <p:nvPr/>
         </p:nvSpPr>
         <p:spPr>
           <a:xfrm>
-            <a:off x="1353312" y="3273552"/>
-            <a:ext cx="5029200" cy="530352"/>
+            <a:off x="7040880" y="2670048"/>
+            <a:ext cx="4206240" cy="786384"/>
           </a:xfrm>
           <a:prstGeom prst="rect">
             <a:avLst/>
@@ -6830,7 +6879,7 @@
               </a:spcAft>
             </a:pPr>
             <a:r>
-              <a:rPr sz="1200" b="0">
+              <a:rPr sz="1150" b="0">
                 <a:solidFill>
                   <a:srgbClr val="1A1A1A"/>
                 </a:solidFill>
@@ -6843,18 +6892,18 @@
       </p:sp>
       <p:sp>
         <p:nvSpPr>
-          <p:cNvPr id="13" name="Rounded Rectangle 12"/>
+          <p:cNvPr id="15" name="Rounded Rectangle 14"/>
           <p:cNvSpPr/>
           <p:nvPr/>
         </p:nvSpPr>
         <p:spPr>
           <a:xfrm>
-            <a:off x="841248" y="3877056"/>
-            <a:ext cx="5715000" cy="530352"/>
+            <a:off x="841248" y="3602736"/>
+            <a:ext cx="5138928" cy="786384"/>
           </a:xfrm>
           <a:prstGeom prst="roundRect">
             <a:avLst>
-              <a:gd name="adj" fmla="val 6000"/>
+              <a:gd name="adj" fmla="val 7000"/>
             </a:avLst>
           </a:prstGeom>
           <a:solidFill>
@@ -6889,9 +6938,55 @@
           </a:p>
         </p:txBody>
       </p:sp>
+      <p:sp>
+        <p:nvSpPr>
+          <p:cNvPr id="16" name="Rounded Rectangle 15"/>
+          <p:cNvSpPr/>
+          <p:nvPr/>
+        </p:nvSpPr>
+        <p:spPr>
+          <a:xfrm>
+            <a:off x="987552" y="3739896"/>
+            <a:ext cx="512064" cy="512064"/>
+          </a:xfrm>
+          <a:prstGeom prst="roundRect">
+            <a:avLst>
+              <a:gd name="adj" fmla="val 26000"/>
+            </a:avLst>
+          </a:prstGeom>
+          <a:solidFill>
+            <a:srgbClr val="EE0000"/>
+          </a:solidFill>
+          <a:ln>
+            <a:noFill/>
+          </a:ln>
+          <a:effectLst/>
+        </p:spPr>
+        <p:style>
+          <a:lnRef idx="1">
+            <a:schemeClr val="accent1"/>
+          </a:lnRef>
+          <a:fillRef idx="3">
+            <a:schemeClr val="accent1"/>
+          </a:fillRef>
+          <a:effectRef idx="2">
+            <a:schemeClr val="accent1"/>
+          </a:effectRef>
+          <a:fontRef idx="minor">
+            <a:schemeClr val="lt1"/>
+          </a:fontRef>
+        </p:style>
+        <p:txBody>
+          <a:bodyPr rtlCol="0" anchor="ctr"/>
+          <a:lstStyle/>
+          <a:p>
+            <a:pPr algn="ctr"/>
+          </a:p>
+        </p:txBody>
+      </p:sp>
       <p:pic>
         <p:nvPicPr>
-          <p:cNvPr id="14" name="Picture 13" descr="check_steel.png"/>
+          <p:cNvPr id="17" name="Picture 16" descr="check_white.png"/>
           <p:cNvPicPr>
             <a:picLocks noChangeAspect="1"/>
           </p:cNvPicPr>
@@ -6905,8 +7000,8 @@
         </p:blipFill>
         <p:spPr>
           <a:xfrm>
-            <a:off x="987552" y="4023360"/>
-            <a:ext cx="237744" cy="237744"/>
+            <a:off x="1110447" y="3862791"/>
+            <a:ext cx="266273" cy="266273"/>
           </a:xfrm>
           <a:prstGeom prst="rect">
             <a:avLst/>
@@ -6915,14 +7010,14 @@
       </p:pic>
       <p:sp>
         <p:nvSpPr>
-          <p:cNvPr id="15" name="TextBox 14"/>
+          <p:cNvPr id="18" name="TextBox 17"/>
           <p:cNvSpPr txBox="1"/>
           <p:nvPr/>
         </p:nvSpPr>
         <p:spPr>
           <a:xfrm>
-            <a:off x="1353312" y="3877056"/>
-            <a:ext cx="5029200" cy="530352"/>
+            <a:off x="1627632" y="3602736"/>
+            <a:ext cx="4206240" cy="786384"/>
           </a:xfrm>
           <a:prstGeom prst="rect">
             <a:avLst/>
@@ -6947,7 +7042,7 @@
               </a:spcAft>
             </a:pPr>
             <a:r>
-              <a:rPr sz="1200" b="0">
+              <a:rPr sz="1150" b="0">
                 <a:solidFill>
                   <a:srgbClr val="1A1A1A"/>
                 </a:solidFill>
@@ -6960,18 +7055,18 @@
       </p:sp>
       <p:sp>
         <p:nvSpPr>
-          <p:cNvPr id="16" name="Rounded Rectangle 15"/>
+          <p:cNvPr id="19" name="Rounded Rectangle 18"/>
           <p:cNvSpPr/>
           <p:nvPr/>
         </p:nvSpPr>
         <p:spPr>
           <a:xfrm>
-            <a:off x="841248" y="4480560"/>
-            <a:ext cx="5715000" cy="530352"/>
+            <a:off x="6254496" y="3602736"/>
+            <a:ext cx="5138928" cy="786384"/>
           </a:xfrm>
           <a:prstGeom prst="roundRect">
             <a:avLst>
-              <a:gd name="adj" fmla="val 6000"/>
+              <a:gd name="adj" fmla="val 7000"/>
             </a:avLst>
           </a:prstGeom>
           <a:solidFill>
@@ -7006,9 +7101,55 @@
           </a:p>
         </p:txBody>
       </p:sp>
+      <p:sp>
+        <p:nvSpPr>
+          <p:cNvPr id="20" name="Rounded Rectangle 19"/>
+          <p:cNvSpPr/>
+          <p:nvPr/>
+        </p:nvSpPr>
+        <p:spPr>
+          <a:xfrm>
+            <a:off x="6400800" y="3739896"/>
+            <a:ext cx="512064" cy="512064"/>
+          </a:xfrm>
+          <a:prstGeom prst="roundRect">
+            <a:avLst>
+              <a:gd name="adj" fmla="val 26000"/>
+            </a:avLst>
+          </a:prstGeom>
+          <a:solidFill>
+            <a:srgbClr val="EE0000"/>
+          </a:solidFill>
+          <a:ln>
+            <a:noFill/>
+          </a:ln>
+          <a:effectLst/>
+        </p:spPr>
+        <p:style>
+          <a:lnRef idx="1">
+            <a:schemeClr val="accent1"/>
+          </a:lnRef>
+          <a:fillRef idx="3">
+            <a:schemeClr val="accent1"/>
+          </a:fillRef>
+          <a:effectRef idx="2">
+            <a:schemeClr val="accent1"/>
+          </a:effectRef>
+          <a:fontRef idx="minor">
+            <a:schemeClr val="lt1"/>
+          </a:fontRef>
+        </p:style>
+        <p:txBody>
+          <a:bodyPr rtlCol="0" anchor="ctr"/>
+          <a:lstStyle/>
+          <a:p>
+            <a:pPr algn="ctr"/>
+          </a:p>
+        </p:txBody>
+      </p:sp>
       <p:pic>
         <p:nvPicPr>
-          <p:cNvPr id="17" name="Picture 16" descr="check_steel.png"/>
+          <p:cNvPr id="21" name="Picture 20" descr="check_white.png"/>
           <p:cNvPicPr>
             <a:picLocks noChangeAspect="1"/>
           </p:cNvPicPr>
@@ -7022,8 +7163,8 @@
         </p:blipFill>
         <p:spPr>
           <a:xfrm>
-            <a:off x="987552" y="4626864"/>
-            <a:ext cx="237744" cy="237744"/>
+            <a:off x="6523695" y="3862791"/>
+            <a:ext cx="266273" cy="266273"/>
           </a:xfrm>
           <a:prstGeom prst="rect">
             <a:avLst/>
@@ -7032,14 +7173,14 @@
       </p:pic>
       <p:sp>
         <p:nvSpPr>
-          <p:cNvPr id="18" name="TextBox 17"/>
+          <p:cNvPr id="22" name="TextBox 21"/>
           <p:cNvSpPr txBox="1"/>
           <p:nvPr/>
         </p:nvSpPr>
         <p:spPr>
           <a:xfrm>
-            <a:off x="1353312" y="4480560"/>
-            <a:ext cx="5029200" cy="530352"/>
+            <a:off x="7040880" y="3602736"/>
+            <a:ext cx="4206240" cy="786384"/>
           </a:xfrm>
           <a:prstGeom prst="rect">
             <a:avLst/>
@@ -7064,7 +7205,7 @@
               </a:spcAft>
             </a:pPr>
             <a:r>
-              <a:rPr sz="1200" b="0">
+              <a:rPr sz="1150" b="0">
                 <a:solidFill>
                   <a:srgbClr val="1A1A1A"/>
                 </a:solidFill>
@@ -7077,18 +7218,18 @@
       </p:sp>
       <p:sp>
         <p:nvSpPr>
-          <p:cNvPr id="19" name="Rounded Rectangle 18"/>
+          <p:cNvPr id="23" name="Rounded Rectangle 22"/>
           <p:cNvSpPr/>
           <p:nvPr/>
         </p:nvSpPr>
         <p:spPr>
           <a:xfrm>
-            <a:off x="841248" y="5084064"/>
-            <a:ext cx="5715000" cy="530352"/>
+            <a:off x="841248" y="4535424"/>
+            <a:ext cx="5138928" cy="786384"/>
           </a:xfrm>
           <a:prstGeom prst="roundRect">
             <a:avLst>
-              <a:gd name="adj" fmla="val 6000"/>
+              <a:gd name="adj" fmla="val 7000"/>
             </a:avLst>
           </a:prstGeom>
           <a:solidFill>
@@ -7123,9 +7264,55 @@
           </a:p>
         </p:txBody>
       </p:sp>
+      <p:sp>
+        <p:nvSpPr>
+          <p:cNvPr id="24" name="Rounded Rectangle 23"/>
+          <p:cNvSpPr/>
+          <p:nvPr/>
+        </p:nvSpPr>
+        <p:spPr>
+          <a:xfrm>
+            <a:off x="987552" y="4672584"/>
+            <a:ext cx="512064" cy="512064"/>
+          </a:xfrm>
+          <a:prstGeom prst="roundRect">
+            <a:avLst>
+              <a:gd name="adj" fmla="val 26000"/>
+            </a:avLst>
+          </a:prstGeom>
+          <a:solidFill>
+            <a:srgbClr val="EE0000"/>
+          </a:solidFill>
+          <a:ln>
+            <a:noFill/>
+          </a:ln>
+          <a:effectLst/>
+        </p:spPr>
+        <p:style>
+          <a:lnRef idx="1">
+            <a:schemeClr val="accent1"/>
+          </a:lnRef>
+          <a:fillRef idx="3">
+            <a:schemeClr val="accent1"/>
+          </a:fillRef>
+          <a:effectRef idx="2">
+            <a:schemeClr val="accent1"/>
+          </a:effectRef>
+          <a:fontRef idx="minor">
+            <a:schemeClr val="lt1"/>
+          </a:fontRef>
+        </p:style>
+        <p:txBody>
+          <a:bodyPr rtlCol="0" anchor="ctr"/>
+          <a:lstStyle/>
+          <a:p>
+            <a:pPr algn="ctr"/>
+          </a:p>
+        </p:txBody>
+      </p:sp>
       <p:pic>
         <p:nvPicPr>
-          <p:cNvPr id="20" name="Picture 19" descr="check_steel.png"/>
+          <p:cNvPr id="25" name="Picture 24" descr="check_white.png"/>
           <p:cNvPicPr>
             <a:picLocks noChangeAspect="1"/>
           </p:cNvPicPr>
@@ -7139,8 +7326,8 @@
         </p:blipFill>
         <p:spPr>
           <a:xfrm>
-            <a:off x="987552" y="5230368"/>
-            <a:ext cx="237744" cy="237744"/>
+            <a:off x="1110447" y="4795479"/>
+            <a:ext cx="266273" cy="266273"/>
           </a:xfrm>
           <a:prstGeom prst="rect">
             <a:avLst/>
@@ -7149,14 +7336,14 @@
       </p:pic>
       <p:sp>
         <p:nvSpPr>
-          <p:cNvPr id="21" name="TextBox 20"/>
+          <p:cNvPr id="26" name="TextBox 25"/>
           <p:cNvSpPr txBox="1"/>
           <p:nvPr/>
         </p:nvSpPr>
         <p:spPr>
           <a:xfrm>
-            <a:off x="1353312" y="5084064"/>
-            <a:ext cx="5029200" cy="530352"/>
+            <a:off x="1627632" y="4535424"/>
+            <a:ext cx="4206240" cy="786384"/>
           </a:xfrm>
           <a:prstGeom prst="rect">
             <a:avLst/>
@@ -7181,221 +7368,13 @@
               </a:spcAft>
             </a:pPr>
             <a:r>
-              <a:rPr sz="1200" b="0">
+              <a:rPr sz="1150" b="0">
                 <a:solidFill>
                   <a:srgbClr val="1A1A1A"/>
                 </a:solidFill>
                 <a:latin typeface="Red Hat Text"/>
               </a:rPr>
               <a:t>helm template renders it — see exactly what will apply</a:t>
-            </a:r>
-          </a:p>
-        </p:txBody>
-      </p:sp>
-      <p:sp>
-        <p:nvSpPr>
-          <p:cNvPr id="22" name="Rounded Rectangle 21"/>
-          <p:cNvSpPr/>
-          <p:nvPr/>
-        </p:nvSpPr>
-        <p:spPr>
-          <a:xfrm>
-            <a:off x="6812280" y="2670048"/>
-            <a:ext cx="4538167" cy="2944368"/>
-          </a:xfrm>
-          <a:prstGeom prst="roundRect">
-            <a:avLst>
-              <a:gd name="adj" fmla="val 4000"/>
-            </a:avLst>
-          </a:prstGeom>
-          <a:solidFill>
-            <a:srgbClr val="FFFFFF"/>
-          </a:solidFill>
-          <a:ln w="15240">
-            <a:solidFill>
-              <a:srgbClr val="DDE1E6"/>
-            </a:solidFill>
-          </a:ln>
-          <a:effectLst/>
-        </p:spPr>
-        <p:style>
-          <a:lnRef idx="1">
-            <a:schemeClr val="accent1"/>
-          </a:lnRef>
-          <a:fillRef idx="3">
-            <a:schemeClr val="accent1"/>
-          </a:fillRef>
-          <a:effectRef idx="2">
-            <a:schemeClr val="accent1"/>
-          </a:effectRef>
-          <a:fontRef idx="minor">
-            <a:schemeClr val="lt1"/>
-          </a:fontRef>
-        </p:style>
-        <p:txBody>
-          <a:bodyPr rtlCol="0" anchor="ctr"/>
-          <a:lstStyle/>
-          <a:p>
-            <a:pPr algn="ctr"/>
-          </a:p>
-        </p:txBody>
-      </p:sp>
-      <p:sp>
-        <p:nvSpPr>
-          <p:cNvPr id="23" name="Rounded Rectangle 22"/>
-          <p:cNvSpPr/>
-          <p:nvPr/>
-        </p:nvSpPr>
-        <p:spPr>
-          <a:xfrm>
-            <a:off x="7013448" y="2871216"/>
-            <a:ext cx="1298448" cy="310896"/>
-          </a:xfrm>
-          <a:prstGeom prst="roundRect">
-            <a:avLst>
-              <a:gd name="adj" fmla="val 50000"/>
-            </a:avLst>
-          </a:prstGeom>
-          <a:solidFill>
-            <a:srgbClr val="FCECEC"/>
-          </a:solidFill>
-          <a:ln>
-            <a:noFill/>
-          </a:ln>
-          <a:effectLst/>
-        </p:spPr>
-        <p:style>
-          <a:lnRef idx="1">
-            <a:schemeClr val="accent1"/>
-          </a:lnRef>
-          <a:fillRef idx="3">
-            <a:schemeClr val="accent1"/>
-          </a:fillRef>
-          <a:effectRef idx="2">
-            <a:schemeClr val="accent1"/>
-          </a:effectRef>
-          <a:fontRef idx="minor">
-            <a:schemeClr val="lt1"/>
-          </a:fontRef>
-        </p:style>
-        <p:txBody>
-          <a:bodyPr rtlCol="0" anchor="ctr"/>
-          <a:lstStyle/>
-          <a:p>
-            <a:pPr algn="ctr"/>
-          </a:p>
-        </p:txBody>
-      </p:sp>
-      <p:sp>
-        <p:nvSpPr>
-          <p:cNvPr id="24" name="TextBox 23"/>
-          <p:cNvSpPr txBox="1"/>
-          <p:nvPr/>
-        </p:nvSpPr>
-        <p:spPr>
-          <a:xfrm>
-            <a:off x="7013448" y="2871216"/>
-            <a:ext cx="1298448" cy="310896"/>
-          </a:xfrm>
-          <a:prstGeom prst="rect">
-            <a:avLst/>
-          </a:prstGeom>
-          <a:noFill/>
-        </p:spPr>
-        <p:txBody>
-          <a:bodyPr wrap="none" anchor="ctr" lIns="0" rIns="0" tIns="0" bIns="0">
-            <a:spAutoFit/>
-          </a:bodyPr>
-          <a:lstStyle/>
-          <a:p>
-            <a:pPr algn="ctr">
-              <a:lnSpc>
-                <a:spcPct val="106000"/>
-              </a:lnSpc>
-              <a:spcBef>
-                <a:spcPts val="0"/>
-              </a:spcBef>
-              <a:spcAft>
-                <a:spcPts val="0"/>
-              </a:spcAft>
-            </a:pPr>
-            <a:r>
-              <a:rPr sz="850" b="1">
-                <a:solidFill>
-                  <a:srgbClr val="B80000"/>
-                </a:solidFill>
-                <a:latin typeface="Red Hat Display"/>
-              </a:rPr>
-              <a:t>MEDIA PASS</a:t>
-            </a:r>
-          </a:p>
-        </p:txBody>
-      </p:sp>
-      <p:pic>
-        <p:nvPicPr>
-          <p:cNvPr id="25" name="Picture 24" descr="eye_slate.png"/>
-          <p:cNvPicPr>
-            <a:picLocks noChangeAspect="1"/>
-          </p:cNvPicPr>
-          <p:nvPr/>
-        </p:nvPicPr>
-        <p:blipFill>
-          <a:blip r:embed="rId4"/>
-          <a:stretch>
-            <a:fillRect/>
-          </a:stretch>
-        </p:blipFill>
-        <p:spPr>
-          <a:xfrm>
-            <a:off x="8843619" y="3383280"/>
-            <a:ext cx="475488" cy="475488"/>
-          </a:xfrm>
-          <a:prstGeom prst="rect">
-            <a:avLst/>
-          </a:prstGeom>
-        </p:spPr>
-      </p:pic>
-      <p:sp>
-        <p:nvSpPr>
-          <p:cNvPr id="26" name="TextBox 25"/>
-          <p:cNvSpPr txBox="1"/>
-          <p:nvPr/>
-        </p:nvSpPr>
-        <p:spPr>
-          <a:xfrm>
-            <a:off x="7050024" y="3995928"/>
-            <a:ext cx="4062679" cy="1481328"/>
-          </a:xfrm>
-          <a:prstGeom prst="rect">
-            <a:avLst/>
-          </a:prstGeom>
-          <a:noFill/>
-        </p:spPr>
-        <p:txBody>
-          <a:bodyPr wrap="square" anchor="t" lIns="0" rIns="0" tIns="0" bIns="0">
-            <a:spAutoFit/>
-          </a:bodyPr>
-          <a:lstStyle/>
-          <a:p>
-            <a:pPr algn="l">
-              <a:lnSpc>
-                <a:spcPct val="120000"/>
-              </a:lnSpc>
-              <a:spcBef>
-                <a:spcPts val="0"/>
-              </a:spcBef>
-              <a:spcAft>
-                <a:spcPts val="0"/>
-              </a:spcAft>
-            </a:pPr>
-            <a:r>
-              <a:rPr sz="950" b="0">
-                <a:solidFill>
-                  <a:srgbClr val="8A9099"/>
-                </a:solidFill>
-                <a:latin typeface="Red Hat Text"/>
-              </a:rPr>
-              <a:t>A chart tree (Chart.yaml, values.yaml, templates/deployment.yaml, route.yaml, tests/) with an arrow from a values.yaml field into a {{ }} placeholder in a template, rendering to a real Deployment+Route.</a:t>
             </a:r>
           </a:p>
         </p:txBody>
@@ -7748,11 +7727,11 @@
         <p:spPr>
           <a:xfrm>
             <a:off x="841248" y="2670048"/>
-            <a:ext cx="5715000" cy="530352"/>
+            <a:ext cx="5138928" cy="786384"/>
           </a:xfrm>
           <a:prstGeom prst="roundRect">
             <a:avLst>
-              <a:gd name="adj" fmla="val 6000"/>
+              <a:gd name="adj" fmla="val 7000"/>
             </a:avLst>
           </a:prstGeom>
           <a:solidFill>
@@ -7787,9 +7766,55 @@
           </a:p>
         </p:txBody>
       </p:sp>
+      <p:sp>
+        <p:nvSpPr>
+          <p:cNvPr id="8" name="Rounded Rectangle 7"/>
+          <p:cNvSpPr/>
+          <p:nvPr/>
+        </p:nvSpPr>
+        <p:spPr>
+          <a:xfrm>
+            <a:off x="987552" y="2807208"/>
+            <a:ext cx="512064" cy="512064"/>
+          </a:xfrm>
+          <a:prstGeom prst="roundRect">
+            <a:avLst>
+              <a:gd name="adj" fmla="val 26000"/>
+            </a:avLst>
+          </a:prstGeom>
+          <a:solidFill>
+            <a:srgbClr val="EE0000"/>
+          </a:solidFill>
+          <a:ln>
+            <a:noFill/>
+          </a:ln>
+          <a:effectLst/>
+        </p:spPr>
+        <p:style>
+          <a:lnRef idx="1">
+            <a:schemeClr val="accent1"/>
+          </a:lnRef>
+          <a:fillRef idx="3">
+            <a:schemeClr val="accent1"/>
+          </a:fillRef>
+          <a:effectRef idx="2">
+            <a:schemeClr val="accent1"/>
+          </a:effectRef>
+          <a:fontRef idx="minor">
+            <a:schemeClr val="lt1"/>
+          </a:fontRef>
+        </p:style>
+        <p:txBody>
+          <a:bodyPr rtlCol="0" anchor="ctr"/>
+          <a:lstStyle/>
+          <a:p>
+            <a:pPr algn="ctr"/>
+          </a:p>
+        </p:txBody>
+      </p:sp>
       <p:pic>
         <p:nvPicPr>
-          <p:cNvPr id="8" name="Picture 7" descr="check_steel.png"/>
+          <p:cNvPr id="9" name="Picture 8" descr="check_white.png"/>
           <p:cNvPicPr>
             <a:picLocks noChangeAspect="1"/>
           </p:cNvPicPr>
@@ -7803,8 +7828,8 @@
         </p:blipFill>
         <p:spPr>
           <a:xfrm>
-            <a:off x="987552" y="2816352"/>
-            <a:ext cx="237744" cy="237744"/>
+            <a:off x="1110447" y="2930103"/>
+            <a:ext cx="266273" cy="266273"/>
           </a:xfrm>
           <a:prstGeom prst="rect">
             <a:avLst/>
@@ -7813,14 +7838,14 @@
       </p:pic>
       <p:sp>
         <p:nvSpPr>
-          <p:cNvPr id="9" name="TextBox 8"/>
+          <p:cNvPr id="10" name="TextBox 9"/>
           <p:cNvSpPr txBox="1"/>
           <p:nvPr/>
         </p:nvSpPr>
         <p:spPr>
           <a:xfrm>
-            <a:off x="1353312" y="2670048"/>
-            <a:ext cx="5029200" cy="530352"/>
+            <a:off x="1627632" y="2670048"/>
+            <a:ext cx="4206240" cy="786384"/>
           </a:xfrm>
           <a:prstGeom prst="rect">
             <a:avLst/>
@@ -7845,7 +7870,7 @@
               </a:spcAft>
             </a:pPr>
             <a:r>
-              <a:rPr sz="1200" b="0">
+              <a:rPr sz="1150" b="0">
                 <a:solidFill>
                   <a:srgbClr val="1A1A1A"/>
                 </a:solidFill>
@@ -7858,18 +7883,18 @@
       </p:sp>
       <p:sp>
         <p:nvSpPr>
-          <p:cNvPr id="10" name="Rounded Rectangle 9"/>
+          <p:cNvPr id="11" name="Rounded Rectangle 10"/>
           <p:cNvSpPr/>
           <p:nvPr/>
         </p:nvSpPr>
         <p:spPr>
           <a:xfrm>
-            <a:off x="841248" y="3273552"/>
-            <a:ext cx="5715000" cy="530352"/>
+            <a:off x="6254496" y="2670048"/>
+            <a:ext cx="5138928" cy="786384"/>
           </a:xfrm>
           <a:prstGeom prst="roundRect">
             <a:avLst>
-              <a:gd name="adj" fmla="val 6000"/>
+              <a:gd name="adj" fmla="val 7000"/>
             </a:avLst>
           </a:prstGeom>
           <a:solidFill>
@@ -7904,9 +7929,55 @@
           </a:p>
         </p:txBody>
       </p:sp>
+      <p:sp>
+        <p:nvSpPr>
+          <p:cNvPr id="12" name="Rounded Rectangle 11"/>
+          <p:cNvSpPr/>
+          <p:nvPr/>
+        </p:nvSpPr>
+        <p:spPr>
+          <a:xfrm>
+            <a:off x="6400800" y="2807208"/>
+            <a:ext cx="512064" cy="512064"/>
+          </a:xfrm>
+          <a:prstGeom prst="roundRect">
+            <a:avLst>
+              <a:gd name="adj" fmla="val 26000"/>
+            </a:avLst>
+          </a:prstGeom>
+          <a:solidFill>
+            <a:srgbClr val="EE0000"/>
+          </a:solidFill>
+          <a:ln>
+            <a:noFill/>
+          </a:ln>
+          <a:effectLst/>
+        </p:spPr>
+        <p:style>
+          <a:lnRef idx="1">
+            <a:schemeClr val="accent1"/>
+          </a:lnRef>
+          <a:fillRef idx="3">
+            <a:schemeClr val="accent1"/>
+          </a:fillRef>
+          <a:effectRef idx="2">
+            <a:schemeClr val="accent1"/>
+          </a:effectRef>
+          <a:fontRef idx="minor">
+            <a:schemeClr val="lt1"/>
+          </a:fontRef>
+        </p:style>
+        <p:txBody>
+          <a:bodyPr rtlCol="0" anchor="ctr"/>
+          <a:lstStyle/>
+          <a:p>
+            <a:pPr algn="ctr"/>
+          </a:p>
+        </p:txBody>
+      </p:sp>
       <p:pic>
         <p:nvPicPr>
-          <p:cNvPr id="11" name="Picture 10" descr="check_steel.png"/>
+          <p:cNvPr id="13" name="Picture 12" descr="check_white.png"/>
           <p:cNvPicPr>
             <a:picLocks noChangeAspect="1"/>
           </p:cNvPicPr>
@@ -7920,8 +7991,8 @@
         </p:blipFill>
         <p:spPr>
           <a:xfrm>
-            <a:off x="987552" y="3419856"/>
-            <a:ext cx="237744" cy="237744"/>
+            <a:off x="6523695" y="2930103"/>
+            <a:ext cx="266273" cy="266273"/>
           </a:xfrm>
           <a:prstGeom prst="rect">
             <a:avLst/>
@@ -7930,14 +8001,14 @@
       </p:pic>
       <p:sp>
         <p:nvSpPr>
-          <p:cNvPr id="12" name="TextBox 11"/>
+          <p:cNvPr id="14" name="TextBox 13"/>
           <p:cNvSpPr txBox="1"/>
           <p:nvPr/>
         </p:nvSpPr>
         <p:spPr>
           <a:xfrm>
-            <a:off x="1353312" y="3273552"/>
-            <a:ext cx="5029200" cy="530352"/>
+            <a:off x="7040880" y="2670048"/>
+            <a:ext cx="4206240" cy="786384"/>
           </a:xfrm>
           <a:prstGeom prst="rect">
             <a:avLst/>
@@ -7962,7 +8033,7 @@
               </a:spcAft>
             </a:pPr>
             <a:r>
-              <a:rPr sz="1200" b="0">
+              <a:rPr sz="1150" b="0">
                 <a:solidFill>
                   <a:srgbClr val="1A1A1A"/>
                 </a:solidFill>
@@ -7975,18 +8046,18 @@
       </p:sp>
       <p:sp>
         <p:nvSpPr>
-          <p:cNvPr id="13" name="Rounded Rectangle 12"/>
+          <p:cNvPr id="15" name="Rounded Rectangle 14"/>
           <p:cNvSpPr/>
           <p:nvPr/>
         </p:nvSpPr>
         <p:spPr>
           <a:xfrm>
-            <a:off x="841248" y="3877056"/>
-            <a:ext cx="5715000" cy="530352"/>
+            <a:off x="841248" y="3602736"/>
+            <a:ext cx="5138928" cy="786384"/>
           </a:xfrm>
           <a:prstGeom prst="roundRect">
             <a:avLst>
-              <a:gd name="adj" fmla="val 6000"/>
+              <a:gd name="adj" fmla="val 7000"/>
             </a:avLst>
           </a:prstGeom>
           <a:solidFill>
@@ -8021,9 +8092,55 @@
           </a:p>
         </p:txBody>
       </p:sp>
+      <p:sp>
+        <p:nvSpPr>
+          <p:cNvPr id="16" name="Rounded Rectangle 15"/>
+          <p:cNvSpPr/>
+          <p:nvPr/>
+        </p:nvSpPr>
+        <p:spPr>
+          <a:xfrm>
+            <a:off x="987552" y="3739896"/>
+            <a:ext cx="512064" cy="512064"/>
+          </a:xfrm>
+          <a:prstGeom prst="roundRect">
+            <a:avLst>
+              <a:gd name="adj" fmla="val 26000"/>
+            </a:avLst>
+          </a:prstGeom>
+          <a:solidFill>
+            <a:srgbClr val="EE0000"/>
+          </a:solidFill>
+          <a:ln>
+            <a:noFill/>
+          </a:ln>
+          <a:effectLst/>
+        </p:spPr>
+        <p:style>
+          <a:lnRef idx="1">
+            <a:schemeClr val="accent1"/>
+          </a:lnRef>
+          <a:fillRef idx="3">
+            <a:schemeClr val="accent1"/>
+          </a:fillRef>
+          <a:effectRef idx="2">
+            <a:schemeClr val="accent1"/>
+          </a:effectRef>
+          <a:fontRef idx="minor">
+            <a:schemeClr val="lt1"/>
+          </a:fontRef>
+        </p:style>
+        <p:txBody>
+          <a:bodyPr rtlCol="0" anchor="ctr"/>
+          <a:lstStyle/>
+          <a:p>
+            <a:pPr algn="ctr"/>
+          </a:p>
+        </p:txBody>
+      </p:sp>
       <p:pic>
         <p:nvPicPr>
-          <p:cNvPr id="14" name="Picture 13" descr="check_steel.png"/>
+          <p:cNvPr id="17" name="Picture 16" descr="check_white.png"/>
           <p:cNvPicPr>
             <a:picLocks noChangeAspect="1"/>
           </p:cNvPicPr>
@@ -8037,8 +8154,8 @@
         </p:blipFill>
         <p:spPr>
           <a:xfrm>
-            <a:off x="987552" y="4023360"/>
-            <a:ext cx="237744" cy="237744"/>
+            <a:off x="1110447" y="3862791"/>
+            <a:ext cx="266273" cy="266273"/>
           </a:xfrm>
           <a:prstGeom prst="rect">
             <a:avLst/>
@@ -8047,14 +8164,14 @@
       </p:pic>
       <p:sp>
         <p:nvSpPr>
-          <p:cNvPr id="15" name="TextBox 14"/>
+          <p:cNvPr id="18" name="TextBox 17"/>
           <p:cNvSpPr txBox="1"/>
           <p:nvPr/>
         </p:nvSpPr>
         <p:spPr>
           <a:xfrm>
-            <a:off x="1353312" y="3877056"/>
-            <a:ext cx="5029200" cy="530352"/>
+            <a:off x="1627632" y="3602736"/>
+            <a:ext cx="4206240" cy="786384"/>
           </a:xfrm>
           <a:prstGeom prst="rect">
             <a:avLst/>
@@ -8079,7 +8196,7 @@
               </a:spcAft>
             </a:pPr>
             <a:r>
-              <a:rPr sz="1200" b="0">
+              <a:rPr sz="1150" b="0">
                 <a:solidFill>
                   <a:srgbClr val="1A1A1A"/>
                 </a:solidFill>
@@ -8092,18 +8209,18 @@
       </p:sp>
       <p:sp>
         <p:nvSpPr>
-          <p:cNvPr id="16" name="Rounded Rectangle 15"/>
+          <p:cNvPr id="19" name="Rounded Rectangle 18"/>
           <p:cNvSpPr/>
           <p:nvPr/>
         </p:nvSpPr>
         <p:spPr>
           <a:xfrm>
-            <a:off x="841248" y="4480560"/>
-            <a:ext cx="5715000" cy="530352"/>
+            <a:off x="6254496" y="3602736"/>
+            <a:ext cx="5138928" cy="786384"/>
           </a:xfrm>
           <a:prstGeom prst="roundRect">
             <a:avLst>
-              <a:gd name="adj" fmla="val 6000"/>
+              <a:gd name="adj" fmla="val 7000"/>
             </a:avLst>
           </a:prstGeom>
           <a:solidFill>
@@ -8138,9 +8255,55 @@
           </a:p>
         </p:txBody>
       </p:sp>
+      <p:sp>
+        <p:nvSpPr>
+          <p:cNvPr id="20" name="Rounded Rectangle 19"/>
+          <p:cNvSpPr/>
+          <p:nvPr/>
+        </p:nvSpPr>
+        <p:spPr>
+          <a:xfrm>
+            <a:off x="6400800" y="3739896"/>
+            <a:ext cx="512064" cy="512064"/>
+          </a:xfrm>
+          <a:prstGeom prst="roundRect">
+            <a:avLst>
+              <a:gd name="adj" fmla="val 26000"/>
+            </a:avLst>
+          </a:prstGeom>
+          <a:solidFill>
+            <a:srgbClr val="EE0000"/>
+          </a:solidFill>
+          <a:ln>
+            <a:noFill/>
+          </a:ln>
+          <a:effectLst/>
+        </p:spPr>
+        <p:style>
+          <a:lnRef idx="1">
+            <a:schemeClr val="accent1"/>
+          </a:lnRef>
+          <a:fillRef idx="3">
+            <a:schemeClr val="accent1"/>
+          </a:fillRef>
+          <a:effectRef idx="2">
+            <a:schemeClr val="accent1"/>
+          </a:effectRef>
+          <a:fontRef idx="minor">
+            <a:schemeClr val="lt1"/>
+          </a:fontRef>
+        </p:style>
+        <p:txBody>
+          <a:bodyPr rtlCol="0" anchor="ctr"/>
+          <a:lstStyle/>
+          <a:p>
+            <a:pPr algn="ctr"/>
+          </a:p>
+        </p:txBody>
+      </p:sp>
       <p:pic>
         <p:nvPicPr>
-          <p:cNvPr id="17" name="Picture 16" descr="check_steel.png"/>
+          <p:cNvPr id="21" name="Picture 20" descr="check_white.png"/>
           <p:cNvPicPr>
             <a:picLocks noChangeAspect="1"/>
           </p:cNvPicPr>
@@ -8154,8 +8317,8 @@
         </p:blipFill>
         <p:spPr>
           <a:xfrm>
-            <a:off x="987552" y="4626864"/>
-            <a:ext cx="237744" cy="237744"/>
+            <a:off x="6523695" y="3862791"/>
+            <a:ext cx="266273" cy="266273"/>
           </a:xfrm>
           <a:prstGeom prst="rect">
             <a:avLst/>
@@ -8164,14 +8327,14 @@
       </p:pic>
       <p:sp>
         <p:nvSpPr>
-          <p:cNvPr id="18" name="TextBox 17"/>
+          <p:cNvPr id="22" name="TextBox 21"/>
           <p:cNvSpPr txBox="1"/>
           <p:nvPr/>
         </p:nvSpPr>
         <p:spPr>
           <a:xfrm>
-            <a:off x="1353312" y="4480560"/>
-            <a:ext cx="5029200" cy="530352"/>
+            <a:off x="7040880" y="3602736"/>
+            <a:ext cx="4206240" cy="786384"/>
           </a:xfrm>
           <a:prstGeom prst="rect">
             <a:avLst/>
@@ -8196,7 +8359,7 @@
               </a:spcAft>
             </a:pPr>
             <a:r>
-              <a:rPr sz="1200" b="0">
+              <a:rPr sz="1150" b="0">
                 <a:solidFill>
                   <a:srgbClr val="1A1A1A"/>
                 </a:solidFill>
@@ -8209,18 +8372,18 @@
       </p:sp>
       <p:sp>
         <p:nvSpPr>
-          <p:cNvPr id="19" name="Rounded Rectangle 18"/>
+          <p:cNvPr id="23" name="Rounded Rectangle 22"/>
           <p:cNvSpPr/>
           <p:nvPr/>
         </p:nvSpPr>
         <p:spPr>
           <a:xfrm>
-            <a:off x="841248" y="5084064"/>
-            <a:ext cx="5715000" cy="530352"/>
+            <a:off x="841248" y="4535424"/>
+            <a:ext cx="5138928" cy="786384"/>
           </a:xfrm>
           <a:prstGeom prst="roundRect">
             <a:avLst>
-              <a:gd name="adj" fmla="val 6000"/>
+              <a:gd name="adj" fmla="val 7000"/>
             </a:avLst>
           </a:prstGeom>
           <a:solidFill>
@@ -8255,9 +8418,55 @@
           </a:p>
         </p:txBody>
       </p:sp>
+      <p:sp>
+        <p:nvSpPr>
+          <p:cNvPr id="24" name="Rounded Rectangle 23"/>
+          <p:cNvSpPr/>
+          <p:nvPr/>
+        </p:nvSpPr>
+        <p:spPr>
+          <a:xfrm>
+            <a:off x="987552" y="4672584"/>
+            <a:ext cx="512064" cy="512064"/>
+          </a:xfrm>
+          <a:prstGeom prst="roundRect">
+            <a:avLst>
+              <a:gd name="adj" fmla="val 26000"/>
+            </a:avLst>
+          </a:prstGeom>
+          <a:solidFill>
+            <a:srgbClr val="EE0000"/>
+          </a:solidFill>
+          <a:ln>
+            <a:noFill/>
+          </a:ln>
+          <a:effectLst/>
+        </p:spPr>
+        <p:style>
+          <a:lnRef idx="1">
+            <a:schemeClr val="accent1"/>
+          </a:lnRef>
+          <a:fillRef idx="3">
+            <a:schemeClr val="accent1"/>
+          </a:fillRef>
+          <a:effectRef idx="2">
+            <a:schemeClr val="accent1"/>
+          </a:effectRef>
+          <a:fontRef idx="minor">
+            <a:schemeClr val="lt1"/>
+          </a:fontRef>
+        </p:style>
+        <p:txBody>
+          <a:bodyPr rtlCol="0" anchor="ctr"/>
+          <a:lstStyle/>
+          <a:p>
+            <a:pPr algn="ctr"/>
+          </a:p>
+        </p:txBody>
+      </p:sp>
       <p:pic>
         <p:nvPicPr>
-          <p:cNvPr id="20" name="Picture 19" descr="check_steel.png"/>
+          <p:cNvPr id="25" name="Picture 24" descr="check_white.png"/>
           <p:cNvPicPr>
             <a:picLocks noChangeAspect="1"/>
           </p:cNvPicPr>
@@ -8271,8 +8480,8 @@
         </p:blipFill>
         <p:spPr>
           <a:xfrm>
-            <a:off x="987552" y="5230368"/>
-            <a:ext cx="237744" cy="237744"/>
+            <a:off x="1110447" y="4795479"/>
+            <a:ext cx="266273" cy="266273"/>
           </a:xfrm>
           <a:prstGeom prst="rect">
             <a:avLst/>
@@ -8281,14 +8490,14 @@
       </p:pic>
       <p:sp>
         <p:nvSpPr>
-          <p:cNvPr id="21" name="TextBox 20"/>
+          <p:cNvPr id="26" name="TextBox 25"/>
           <p:cNvSpPr txBox="1"/>
           <p:nvPr/>
         </p:nvSpPr>
         <p:spPr>
           <a:xfrm>
-            <a:off x="1353312" y="5084064"/>
-            <a:ext cx="5029200" cy="530352"/>
+            <a:off x="1627632" y="4535424"/>
+            <a:ext cx="4206240" cy="786384"/>
           </a:xfrm>
           <a:prstGeom prst="rect">
             <a:avLst/>
@@ -8313,221 +8522,13 @@
               </a:spcAft>
             </a:pPr>
             <a:r>
-              <a:rPr sz="1200" b="0">
+              <a:rPr sz="1150" b="0">
                 <a:solidFill>
                   <a:srgbClr val="1A1A1A"/>
                 </a:solidFill>
                 <a:latin typeface="Red Hat Text"/>
               </a:rPr>
               <a:t>helm rollback → one command back to the last good revision</a:t>
-            </a:r>
-          </a:p>
-        </p:txBody>
-      </p:sp>
-      <p:sp>
-        <p:nvSpPr>
-          <p:cNvPr id="22" name="Rounded Rectangle 21"/>
-          <p:cNvSpPr/>
-          <p:nvPr/>
-        </p:nvSpPr>
-        <p:spPr>
-          <a:xfrm>
-            <a:off x="6812280" y="2670048"/>
-            <a:ext cx="4538167" cy="2944368"/>
-          </a:xfrm>
-          <a:prstGeom prst="roundRect">
-            <a:avLst>
-              <a:gd name="adj" fmla="val 4000"/>
-            </a:avLst>
-          </a:prstGeom>
-          <a:solidFill>
-            <a:srgbClr val="FFFFFF"/>
-          </a:solidFill>
-          <a:ln w="15240">
-            <a:solidFill>
-              <a:srgbClr val="DDE1E6"/>
-            </a:solidFill>
-          </a:ln>
-          <a:effectLst/>
-        </p:spPr>
-        <p:style>
-          <a:lnRef idx="1">
-            <a:schemeClr val="accent1"/>
-          </a:lnRef>
-          <a:fillRef idx="3">
-            <a:schemeClr val="accent1"/>
-          </a:fillRef>
-          <a:effectRef idx="2">
-            <a:schemeClr val="accent1"/>
-          </a:effectRef>
-          <a:fontRef idx="minor">
-            <a:schemeClr val="lt1"/>
-          </a:fontRef>
-        </p:style>
-        <p:txBody>
-          <a:bodyPr rtlCol="0" anchor="ctr"/>
-          <a:lstStyle/>
-          <a:p>
-            <a:pPr algn="ctr"/>
-          </a:p>
-        </p:txBody>
-      </p:sp>
-      <p:sp>
-        <p:nvSpPr>
-          <p:cNvPr id="23" name="Rounded Rectangle 22"/>
-          <p:cNvSpPr/>
-          <p:nvPr/>
-        </p:nvSpPr>
-        <p:spPr>
-          <a:xfrm>
-            <a:off x="7013448" y="2871216"/>
-            <a:ext cx="1298448" cy="310896"/>
-          </a:xfrm>
-          <a:prstGeom prst="roundRect">
-            <a:avLst>
-              <a:gd name="adj" fmla="val 50000"/>
-            </a:avLst>
-          </a:prstGeom>
-          <a:solidFill>
-            <a:srgbClr val="FCECEC"/>
-          </a:solidFill>
-          <a:ln>
-            <a:noFill/>
-          </a:ln>
-          <a:effectLst/>
-        </p:spPr>
-        <p:style>
-          <a:lnRef idx="1">
-            <a:schemeClr val="accent1"/>
-          </a:lnRef>
-          <a:fillRef idx="3">
-            <a:schemeClr val="accent1"/>
-          </a:fillRef>
-          <a:effectRef idx="2">
-            <a:schemeClr val="accent1"/>
-          </a:effectRef>
-          <a:fontRef idx="minor">
-            <a:schemeClr val="lt1"/>
-          </a:fontRef>
-        </p:style>
-        <p:txBody>
-          <a:bodyPr rtlCol="0" anchor="ctr"/>
-          <a:lstStyle/>
-          <a:p>
-            <a:pPr algn="ctr"/>
-          </a:p>
-        </p:txBody>
-      </p:sp>
-      <p:sp>
-        <p:nvSpPr>
-          <p:cNvPr id="24" name="TextBox 23"/>
-          <p:cNvSpPr txBox="1"/>
-          <p:nvPr/>
-        </p:nvSpPr>
-        <p:spPr>
-          <a:xfrm>
-            <a:off x="7013448" y="2871216"/>
-            <a:ext cx="1298448" cy="310896"/>
-          </a:xfrm>
-          <a:prstGeom prst="rect">
-            <a:avLst/>
-          </a:prstGeom>
-          <a:noFill/>
-        </p:spPr>
-        <p:txBody>
-          <a:bodyPr wrap="none" anchor="ctr" lIns="0" rIns="0" tIns="0" bIns="0">
-            <a:spAutoFit/>
-          </a:bodyPr>
-          <a:lstStyle/>
-          <a:p>
-            <a:pPr algn="ctr">
-              <a:lnSpc>
-                <a:spcPct val="106000"/>
-              </a:lnSpc>
-              <a:spcBef>
-                <a:spcPts val="0"/>
-              </a:spcBef>
-              <a:spcAft>
-                <a:spcPts val="0"/>
-              </a:spcAft>
-            </a:pPr>
-            <a:r>
-              <a:rPr sz="850" b="1">
-                <a:solidFill>
-                  <a:srgbClr val="B80000"/>
-                </a:solidFill>
-                <a:latin typeface="Red Hat Display"/>
-              </a:rPr>
-              <a:t>MEDIA PASS</a:t>
-            </a:r>
-          </a:p>
-        </p:txBody>
-      </p:sp>
-      <p:pic>
-        <p:nvPicPr>
-          <p:cNvPr id="25" name="Picture 24" descr="eye_slate.png"/>
-          <p:cNvPicPr>
-            <a:picLocks noChangeAspect="1"/>
-          </p:cNvPicPr>
-          <p:nvPr/>
-        </p:nvPicPr>
-        <p:blipFill>
-          <a:blip r:embed="rId4"/>
-          <a:stretch>
-            <a:fillRect/>
-          </a:stretch>
-        </p:blipFill>
-        <p:spPr>
-          <a:xfrm>
-            <a:off x="8843619" y="3383280"/>
-            <a:ext cx="475488" cy="475488"/>
-          </a:xfrm>
-          <a:prstGeom prst="rect">
-            <a:avLst/>
-          </a:prstGeom>
-        </p:spPr>
-      </p:pic>
-      <p:sp>
-        <p:nvSpPr>
-          <p:cNvPr id="26" name="TextBox 25"/>
-          <p:cNvSpPr txBox="1"/>
-          <p:nvPr/>
-        </p:nvSpPr>
-        <p:spPr>
-          <a:xfrm>
-            <a:off x="7050024" y="3995928"/>
-            <a:ext cx="4062679" cy="1481328"/>
-          </a:xfrm>
-          <a:prstGeom prst="rect">
-            <a:avLst/>
-          </a:prstGeom>
-          <a:noFill/>
-        </p:spPr>
-        <p:txBody>
-          <a:bodyPr wrap="square" anchor="t" lIns="0" rIns="0" tIns="0" bIns="0">
-            <a:spAutoFit/>
-          </a:bodyPr>
-          <a:lstStyle/>
-          <a:p>
-            <a:pPr algn="l">
-              <a:lnSpc>
-                <a:spcPct val="120000"/>
-              </a:lnSpc>
-              <a:spcBef>
-                <a:spcPts val="0"/>
-              </a:spcBef>
-              <a:spcAft>
-                <a:spcPts val="0"/>
-              </a:spcAft>
-            </a:pPr>
-            <a:r>
-              <a:rPr sz="950" b="0">
-                <a:solidFill>
-                  <a:srgbClr val="8A9099"/>
-                </a:solidFill>
-                <a:latin typeface="Red Hat Text"/>
-              </a:rPr>
-              <a:t>A revision timeline: 1 install (green) → 2 upgrade (green) → 3 FAILED (red, with a "old pods still serving" callout) → 4 rollback (green). A small "app stayed UP the whole time" banner under revision 3.</a:t>
             </a:r>
           </a:p>
         </p:txBody>
@@ -8835,11 +8836,11 @@
         <p:spPr>
           <a:xfrm>
             <a:off x="841248" y="2395728"/>
-            <a:ext cx="5715000" cy="530352"/>
+            <a:ext cx="5138928" cy="786384"/>
           </a:xfrm>
           <a:prstGeom prst="roundRect">
             <a:avLst>
-              <a:gd name="adj" fmla="val 6000"/>
+              <a:gd name="adj" fmla="val 7000"/>
             </a:avLst>
           </a:prstGeom>
           <a:solidFill>
@@ -8874,9 +8875,55 @@
           </a:p>
         </p:txBody>
       </p:sp>
+      <p:sp>
+        <p:nvSpPr>
+          <p:cNvPr id="7" name="Rounded Rectangle 6"/>
+          <p:cNvSpPr/>
+          <p:nvPr/>
+        </p:nvSpPr>
+        <p:spPr>
+          <a:xfrm>
+            <a:off x="987552" y="2532888"/>
+            <a:ext cx="512064" cy="512064"/>
+          </a:xfrm>
+          <a:prstGeom prst="roundRect">
+            <a:avLst>
+              <a:gd name="adj" fmla="val 26000"/>
+            </a:avLst>
+          </a:prstGeom>
+          <a:solidFill>
+            <a:srgbClr val="EE0000"/>
+          </a:solidFill>
+          <a:ln>
+            <a:noFill/>
+          </a:ln>
+          <a:effectLst/>
+        </p:spPr>
+        <p:style>
+          <a:lnRef idx="1">
+            <a:schemeClr val="accent1"/>
+          </a:lnRef>
+          <a:fillRef idx="3">
+            <a:schemeClr val="accent1"/>
+          </a:fillRef>
+          <a:effectRef idx="2">
+            <a:schemeClr val="accent1"/>
+          </a:effectRef>
+          <a:fontRef idx="minor">
+            <a:schemeClr val="lt1"/>
+          </a:fontRef>
+        </p:style>
+        <p:txBody>
+          <a:bodyPr rtlCol="0" anchor="ctr"/>
+          <a:lstStyle/>
+          <a:p>
+            <a:pPr algn="ctr"/>
+          </a:p>
+        </p:txBody>
+      </p:sp>
       <p:pic>
         <p:nvPicPr>
-          <p:cNvPr id="7" name="Picture 6" descr="check_steel.png"/>
+          <p:cNvPr id="8" name="Picture 7" descr="check_white.png"/>
           <p:cNvPicPr>
             <a:picLocks noChangeAspect="1"/>
           </p:cNvPicPr>
@@ -8890,8 +8937,8 @@
         </p:blipFill>
         <p:spPr>
           <a:xfrm>
-            <a:off x="987552" y="2542032"/>
-            <a:ext cx="237744" cy="237744"/>
+            <a:off x="1110447" y="2655783"/>
+            <a:ext cx="266273" cy="266273"/>
           </a:xfrm>
           <a:prstGeom prst="rect">
             <a:avLst/>
@@ -8900,14 +8947,14 @@
       </p:pic>
       <p:sp>
         <p:nvSpPr>
-          <p:cNvPr id="8" name="TextBox 7"/>
+          <p:cNvPr id="9" name="TextBox 8"/>
           <p:cNvSpPr txBox="1"/>
           <p:nvPr/>
         </p:nvSpPr>
         <p:spPr>
           <a:xfrm>
-            <a:off x="1353312" y="2395728"/>
-            <a:ext cx="5029200" cy="530352"/>
+            <a:off x="1627632" y="2395728"/>
+            <a:ext cx="4206240" cy="786384"/>
           </a:xfrm>
           <a:prstGeom prst="rect">
             <a:avLst/>
@@ -8932,7 +8979,7 @@
               </a:spcAft>
             </a:pPr>
             <a:r>
-              <a:rPr sz="1200" b="0">
+              <a:rPr sz="1150" b="0">
                 <a:solidFill>
                   <a:srgbClr val="1A1A1A"/>
                 </a:solidFill>
@@ -8945,18 +8992,18 @@
       </p:sp>
       <p:sp>
         <p:nvSpPr>
-          <p:cNvPr id="9" name="Rounded Rectangle 8"/>
+          <p:cNvPr id="10" name="Rounded Rectangle 9"/>
           <p:cNvSpPr/>
           <p:nvPr/>
         </p:nvSpPr>
         <p:spPr>
           <a:xfrm>
-            <a:off x="841248" y="2999232"/>
-            <a:ext cx="5715000" cy="530352"/>
+            <a:off x="6254496" y="2395728"/>
+            <a:ext cx="5138928" cy="786384"/>
           </a:xfrm>
           <a:prstGeom prst="roundRect">
             <a:avLst>
-              <a:gd name="adj" fmla="val 6000"/>
+              <a:gd name="adj" fmla="val 7000"/>
             </a:avLst>
           </a:prstGeom>
           <a:solidFill>
@@ -8991,9 +9038,55 @@
           </a:p>
         </p:txBody>
       </p:sp>
+      <p:sp>
+        <p:nvSpPr>
+          <p:cNvPr id="11" name="Rounded Rectangle 10"/>
+          <p:cNvSpPr/>
+          <p:nvPr/>
+        </p:nvSpPr>
+        <p:spPr>
+          <a:xfrm>
+            <a:off x="6400800" y="2532888"/>
+            <a:ext cx="512064" cy="512064"/>
+          </a:xfrm>
+          <a:prstGeom prst="roundRect">
+            <a:avLst>
+              <a:gd name="adj" fmla="val 26000"/>
+            </a:avLst>
+          </a:prstGeom>
+          <a:solidFill>
+            <a:srgbClr val="EE0000"/>
+          </a:solidFill>
+          <a:ln>
+            <a:noFill/>
+          </a:ln>
+          <a:effectLst/>
+        </p:spPr>
+        <p:style>
+          <a:lnRef idx="1">
+            <a:schemeClr val="accent1"/>
+          </a:lnRef>
+          <a:fillRef idx="3">
+            <a:schemeClr val="accent1"/>
+          </a:fillRef>
+          <a:effectRef idx="2">
+            <a:schemeClr val="accent1"/>
+          </a:effectRef>
+          <a:fontRef idx="minor">
+            <a:schemeClr val="lt1"/>
+          </a:fontRef>
+        </p:style>
+        <p:txBody>
+          <a:bodyPr rtlCol="0" anchor="ctr"/>
+          <a:lstStyle/>
+          <a:p>
+            <a:pPr algn="ctr"/>
+          </a:p>
+        </p:txBody>
+      </p:sp>
       <p:pic>
         <p:nvPicPr>
-          <p:cNvPr id="10" name="Picture 9" descr="check_steel.png"/>
+          <p:cNvPr id="12" name="Picture 11" descr="check_white.png"/>
           <p:cNvPicPr>
             <a:picLocks noChangeAspect="1"/>
           </p:cNvPicPr>
@@ -9007,8 +9100,8 @@
         </p:blipFill>
         <p:spPr>
           <a:xfrm>
-            <a:off x="987552" y="3145536"/>
-            <a:ext cx="237744" cy="237744"/>
+            <a:off x="6523695" y="2655783"/>
+            <a:ext cx="266273" cy="266273"/>
           </a:xfrm>
           <a:prstGeom prst="rect">
             <a:avLst/>
@@ -9017,14 +9110,14 @@
       </p:pic>
       <p:sp>
         <p:nvSpPr>
-          <p:cNvPr id="11" name="TextBox 10"/>
+          <p:cNvPr id="13" name="TextBox 12"/>
           <p:cNvSpPr txBox="1"/>
           <p:nvPr/>
         </p:nvSpPr>
         <p:spPr>
           <a:xfrm>
-            <a:off x="1353312" y="2999232"/>
-            <a:ext cx="5029200" cy="530352"/>
+            <a:off x="7040880" y="2395728"/>
+            <a:ext cx="4206240" cy="786384"/>
           </a:xfrm>
           <a:prstGeom prst="rect">
             <a:avLst/>
@@ -9049,7 +9142,7 @@
               </a:spcAft>
             </a:pPr>
             <a:r>
-              <a:rPr sz="1200" b="0">
+              <a:rPr sz="1150" b="0">
                 <a:solidFill>
                   <a:srgbClr val="1A1A1A"/>
                 </a:solidFill>
@@ -9062,18 +9155,18 @@
       </p:sp>
       <p:sp>
         <p:nvSpPr>
-          <p:cNvPr id="12" name="Rounded Rectangle 11"/>
+          <p:cNvPr id="14" name="Rounded Rectangle 13"/>
           <p:cNvSpPr/>
           <p:nvPr/>
         </p:nvSpPr>
         <p:spPr>
           <a:xfrm>
-            <a:off x="841248" y="3602736"/>
-            <a:ext cx="5715000" cy="530352"/>
+            <a:off x="841248" y="3328416"/>
+            <a:ext cx="5138928" cy="786384"/>
           </a:xfrm>
           <a:prstGeom prst="roundRect">
             <a:avLst>
-              <a:gd name="adj" fmla="val 6000"/>
+              <a:gd name="adj" fmla="val 7000"/>
             </a:avLst>
           </a:prstGeom>
           <a:solidFill>
@@ -9108,9 +9201,55 @@
           </a:p>
         </p:txBody>
       </p:sp>
+      <p:sp>
+        <p:nvSpPr>
+          <p:cNvPr id="15" name="Rounded Rectangle 14"/>
+          <p:cNvSpPr/>
+          <p:nvPr/>
+        </p:nvSpPr>
+        <p:spPr>
+          <a:xfrm>
+            <a:off x="987552" y="3465576"/>
+            <a:ext cx="512064" cy="512064"/>
+          </a:xfrm>
+          <a:prstGeom prst="roundRect">
+            <a:avLst>
+              <a:gd name="adj" fmla="val 26000"/>
+            </a:avLst>
+          </a:prstGeom>
+          <a:solidFill>
+            <a:srgbClr val="EE0000"/>
+          </a:solidFill>
+          <a:ln>
+            <a:noFill/>
+          </a:ln>
+          <a:effectLst/>
+        </p:spPr>
+        <p:style>
+          <a:lnRef idx="1">
+            <a:schemeClr val="accent1"/>
+          </a:lnRef>
+          <a:fillRef idx="3">
+            <a:schemeClr val="accent1"/>
+          </a:fillRef>
+          <a:effectRef idx="2">
+            <a:schemeClr val="accent1"/>
+          </a:effectRef>
+          <a:fontRef idx="minor">
+            <a:schemeClr val="lt1"/>
+          </a:fontRef>
+        </p:style>
+        <p:txBody>
+          <a:bodyPr rtlCol="0" anchor="ctr"/>
+          <a:lstStyle/>
+          <a:p>
+            <a:pPr algn="ctr"/>
+          </a:p>
+        </p:txBody>
+      </p:sp>
       <p:pic>
         <p:nvPicPr>
-          <p:cNvPr id="13" name="Picture 12" descr="check_steel.png"/>
+          <p:cNvPr id="16" name="Picture 15" descr="check_white.png"/>
           <p:cNvPicPr>
             <a:picLocks noChangeAspect="1"/>
           </p:cNvPicPr>
@@ -9124,8 +9263,8 @@
         </p:blipFill>
         <p:spPr>
           <a:xfrm>
-            <a:off x="987552" y="3749040"/>
-            <a:ext cx="237744" cy="237744"/>
+            <a:off x="1110447" y="3588471"/>
+            <a:ext cx="266273" cy="266273"/>
           </a:xfrm>
           <a:prstGeom prst="rect">
             <a:avLst/>
@@ -9134,14 +9273,14 @@
       </p:pic>
       <p:sp>
         <p:nvSpPr>
-          <p:cNvPr id="14" name="TextBox 13"/>
+          <p:cNvPr id="17" name="TextBox 16"/>
           <p:cNvSpPr txBox="1"/>
           <p:nvPr/>
         </p:nvSpPr>
         <p:spPr>
           <a:xfrm>
-            <a:off x="1353312" y="3602736"/>
-            <a:ext cx="5029200" cy="530352"/>
+            <a:off x="1627632" y="3328416"/>
+            <a:ext cx="4206240" cy="786384"/>
           </a:xfrm>
           <a:prstGeom prst="rect">
             <a:avLst/>
@@ -9166,7 +9305,7 @@
               </a:spcAft>
             </a:pPr>
             <a:r>
-              <a:rPr sz="1200" b="0">
+              <a:rPr sz="1150" b="0">
                 <a:solidFill>
                   <a:srgbClr val="1A1A1A"/>
                 </a:solidFill>
@@ -9179,18 +9318,18 @@
       </p:sp>
       <p:sp>
         <p:nvSpPr>
-          <p:cNvPr id="15" name="Rounded Rectangle 14"/>
+          <p:cNvPr id="18" name="Rounded Rectangle 17"/>
           <p:cNvSpPr/>
           <p:nvPr/>
         </p:nvSpPr>
         <p:spPr>
           <a:xfrm>
-            <a:off x="841248" y="4206240"/>
-            <a:ext cx="5715000" cy="530352"/>
+            <a:off x="6254496" y="3328416"/>
+            <a:ext cx="5138928" cy="786384"/>
           </a:xfrm>
           <a:prstGeom prst="roundRect">
             <a:avLst>
-              <a:gd name="adj" fmla="val 6000"/>
+              <a:gd name="adj" fmla="val 7000"/>
             </a:avLst>
           </a:prstGeom>
           <a:solidFill>
@@ -9225,9 +9364,55 @@
           </a:p>
         </p:txBody>
       </p:sp>
+      <p:sp>
+        <p:nvSpPr>
+          <p:cNvPr id="19" name="Rounded Rectangle 18"/>
+          <p:cNvSpPr/>
+          <p:nvPr/>
+        </p:nvSpPr>
+        <p:spPr>
+          <a:xfrm>
+            <a:off x="6400800" y="3465576"/>
+            <a:ext cx="512064" cy="512064"/>
+          </a:xfrm>
+          <a:prstGeom prst="roundRect">
+            <a:avLst>
+              <a:gd name="adj" fmla="val 26000"/>
+            </a:avLst>
+          </a:prstGeom>
+          <a:solidFill>
+            <a:srgbClr val="EE0000"/>
+          </a:solidFill>
+          <a:ln>
+            <a:noFill/>
+          </a:ln>
+          <a:effectLst/>
+        </p:spPr>
+        <p:style>
+          <a:lnRef idx="1">
+            <a:schemeClr val="accent1"/>
+          </a:lnRef>
+          <a:fillRef idx="3">
+            <a:schemeClr val="accent1"/>
+          </a:fillRef>
+          <a:effectRef idx="2">
+            <a:schemeClr val="accent1"/>
+          </a:effectRef>
+          <a:fontRef idx="minor">
+            <a:schemeClr val="lt1"/>
+          </a:fontRef>
+        </p:style>
+        <p:txBody>
+          <a:bodyPr rtlCol="0" anchor="ctr"/>
+          <a:lstStyle/>
+          <a:p>
+            <a:pPr algn="ctr"/>
+          </a:p>
+        </p:txBody>
+      </p:sp>
       <p:pic>
         <p:nvPicPr>
-          <p:cNvPr id="16" name="Picture 15" descr="check_steel.png"/>
+          <p:cNvPr id="20" name="Picture 19" descr="check_white.png"/>
           <p:cNvPicPr>
             <a:picLocks noChangeAspect="1"/>
           </p:cNvPicPr>
@@ -9241,8 +9426,8 @@
         </p:blipFill>
         <p:spPr>
           <a:xfrm>
-            <a:off x="987552" y="4352544"/>
-            <a:ext cx="237744" cy="237744"/>
+            <a:off x="6523695" y="3588471"/>
+            <a:ext cx="266273" cy="266273"/>
           </a:xfrm>
           <a:prstGeom prst="rect">
             <a:avLst/>
@@ -9251,14 +9436,14 @@
       </p:pic>
       <p:sp>
         <p:nvSpPr>
-          <p:cNvPr id="17" name="TextBox 16"/>
+          <p:cNvPr id="21" name="TextBox 20"/>
           <p:cNvSpPr txBox="1"/>
           <p:nvPr/>
         </p:nvSpPr>
         <p:spPr>
           <a:xfrm>
-            <a:off x="1353312" y="4206240"/>
-            <a:ext cx="5029200" cy="530352"/>
+            <a:off x="7040880" y="3328416"/>
+            <a:ext cx="4206240" cy="786384"/>
           </a:xfrm>
           <a:prstGeom prst="rect">
             <a:avLst/>
@@ -9283,7 +9468,7 @@
               </a:spcAft>
             </a:pPr>
             <a:r>
-              <a:rPr sz="1200" b="0">
+              <a:rPr sz="1150" b="0">
                 <a:solidFill>
                   <a:srgbClr val="1A1A1A"/>
                 </a:solidFill>
@@ -9296,18 +9481,18 @@
       </p:sp>
       <p:sp>
         <p:nvSpPr>
-          <p:cNvPr id="18" name="Rounded Rectangle 17"/>
+          <p:cNvPr id="22" name="Rounded Rectangle 21"/>
           <p:cNvSpPr/>
           <p:nvPr/>
         </p:nvSpPr>
         <p:spPr>
           <a:xfrm>
-            <a:off x="841248" y="4809744"/>
-            <a:ext cx="5715000" cy="530352"/>
+            <a:off x="841248" y="4261104"/>
+            <a:ext cx="5138928" cy="786384"/>
           </a:xfrm>
           <a:prstGeom prst="roundRect">
             <a:avLst>
-              <a:gd name="adj" fmla="val 6000"/>
+              <a:gd name="adj" fmla="val 7000"/>
             </a:avLst>
           </a:prstGeom>
           <a:solidFill>
@@ -9342,9 +9527,55 @@
           </a:p>
         </p:txBody>
       </p:sp>
+      <p:sp>
+        <p:nvSpPr>
+          <p:cNvPr id="23" name="Rounded Rectangle 22"/>
+          <p:cNvSpPr/>
+          <p:nvPr/>
+        </p:nvSpPr>
+        <p:spPr>
+          <a:xfrm>
+            <a:off x="987552" y="4398264"/>
+            <a:ext cx="512064" cy="512064"/>
+          </a:xfrm>
+          <a:prstGeom prst="roundRect">
+            <a:avLst>
+              <a:gd name="adj" fmla="val 26000"/>
+            </a:avLst>
+          </a:prstGeom>
+          <a:solidFill>
+            <a:srgbClr val="EE0000"/>
+          </a:solidFill>
+          <a:ln>
+            <a:noFill/>
+          </a:ln>
+          <a:effectLst/>
+        </p:spPr>
+        <p:style>
+          <a:lnRef idx="1">
+            <a:schemeClr val="accent1"/>
+          </a:lnRef>
+          <a:fillRef idx="3">
+            <a:schemeClr val="accent1"/>
+          </a:fillRef>
+          <a:effectRef idx="2">
+            <a:schemeClr val="accent1"/>
+          </a:effectRef>
+          <a:fontRef idx="minor">
+            <a:schemeClr val="lt1"/>
+          </a:fontRef>
+        </p:style>
+        <p:txBody>
+          <a:bodyPr rtlCol="0" anchor="ctr"/>
+          <a:lstStyle/>
+          <a:p>
+            <a:pPr algn="ctr"/>
+          </a:p>
+        </p:txBody>
+      </p:sp>
       <p:pic>
         <p:nvPicPr>
-          <p:cNvPr id="19" name="Picture 18" descr="check_steel.png"/>
+          <p:cNvPr id="24" name="Picture 23" descr="check_white.png"/>
           <p:cNvPicPr>
             <a:picLocks noChangeAspect="1"/>
           </p:cNvPicPr>
@@ -9358,8 +9589,8 @@
         </p:blipFill>
         <p:spPr>
           <a:xfrm>
-            <a:off x="987552" y="4956048"/>
-            <a:ext cx="237744" cy="237744"/>
+            <a:off x="1110447" y="4521159"/>
+            <a:ext cx="266273" cy="266273"/>
           </a:xfrm>
           <a:prstGeom prst="rect">
             <a:avLst/>
@@ -9368,14 +9599,14 @@
       </p:pic>
       <p:sp>
         <p:nvSpPr>
-          <p:cNvPr id="20" name="TextBox 19"/>
+          <p:cNvPr id="25" name="TextBox 24"/>
           <p:cNvSpPr txBox="1"/>
           <p:nvPr/>
         </p:nvSpPr>
         <p:spPr>
           <a:xfrm>
-            <a:off x="1353312" y="4809744"/>
-            <a:ext cx="5029200" cy="530352"/>
+            <a:off x="1627632" y="4261104"/>
+            <a:ext cx="4206240" cy="786384"/>
           </a:xfrm>
           <a:prstGeom prst="rect">
             <a:avLst/>
@@ -9400,221 +9631,13 @@
               </a:spcAft>
             </a:pPr>
             <a:r>
-              <a:rPr sz="1200" b="0">
+              <a:rPr sz="1150" b="0">
                 <a:solidFill>
                   <a:srgbClr val="1A1A1A"/>
                 </a:solidFill>
                 <a:latin typeface="Red Hat Text"/>
               </a:rPr>
               <a:t>helm pull → matching sha256 digest = verified round-trip</a:t>
-            </a:r>
-          </a:p>
-        </p:txBody>
-      </p:sp>
-      <p:sp>
-        <p:nvSpPr>
-          <p:cNvPr id="21" name="Rounded Rectangle 20"/>
-          <p:cNvSpPr/>
-          <p:nvPr/>
-        </p:nvSpPr>
-        <p:spPr>
-          <a:xfrm>
-            <a:off x="6812280" y="2395728"/>
-            <a:ext cx="4538167" cy="2944368"/>
-          </a:xfrm>
-          <a:prstGeom prst="roundRect">
-            <a:avLst>
-              <a:gd name="adj" fmla="val 4000"/>
-            </a:avLst>
-          </a:prstGeom>
-          <a:solidFill>
-            <a:srgbClr val="FFFFFF"/>
-          </a:solidFill>
-          <a:ln w="15240">
-            <a:solidFill>
-              <a:srgbClr val="DDE1E6"/>
-            </a:solidFill>
-          </a:ln>
-          <a:effectLst/>
-        </p:spPr>
-        <p:style>
-          <a:lnRef idx="1">
-            <a:schemeClr val="accent1"/>
-          </a:lnRef>
-          <a:fillRef idx="3">
-            <a:schemeClr val="accent1"/>
-          </a:fillRef>
-          <a:effectRef idx="2">
-            <a:schemeClr val="accent1"/>
-          </a:effectRef>
-          <a:fontRef idx="minor">
-            <a:schemeClr val="lt1"/>
-          </a:fontRef>
-        </p:style>
-        <p:txBody>
-          <a:bodyPr rtlCol="0" anchor="ctr"/>
-          <a:lstStyle/>
-          <a:p>
-            <a:pPr algn="ctr"/>
-          </a:p>
-        </p:txBody>
-      </p:sp>
-      <p:sp>
-        <p:nvSpPr>
-          <p:cNvPr id="22" name="Rounded Rectangle 21"/>
-          <p:cNvSpPr/>
-          <p:nvPr/>
-        </p:nvSpPr>
-        <p:spPr>
-          <a:xfrm>
-            <a:off x="7013448" y="2596896"/>
-            <a:ext cx="1298448" cy="310896"/>
-          </a:xfrm>
-          <a:prstGeom prst="roundRect">
-            <a:avLst>
-              <a:gd name="adj" fmla="val 50000"/>
-            </a:avLst>
-          </a:prstGeom>
-          <a:solidFill>
-            <a:srgbClr val="FCECEC"/>
-          </a:solidFill>
-          <a:ln>
-            <a:noFill/>
-          </a:ln>
-          <a:effectLst/>
-        </p:spPr>
-        <p:style>
-          <a:lnRef idx="1">
-            <a:schemeClr val="accent1"/>
-          </a:lnRef>
-          <a:fillRef idx="3">
-            <a:schemeClr val="accent1"/>
-          </a:fillRef>
-          <a:effectRef idx="2">
-            <a:schemeClr val="accent1"/>
-          </a:effectRef>
-          <a:fontRef idx="minor">
-            <a:schemeClr val="lt1"/>
-          </a:fontRef>
-        </p:style>
-        <p:txBody>
-          <a:bodyPr rtlCol="0" anchor="ctr"/>
-          <a:lstStyle/>
-          <a:p>
-            <a:pPr algn="ctr"/>
-          </a:p>
-        </p:txBody>
-      </p:sp>
-      <p:sp>
-        <p:nvSpPr>
-          <p:cNvPr id="23" name="TextBox 22"/>
-          <p:cNvSpPr txBox="1"/>
-          <p:nvPr/>
-        </p:nvSpPr>
-        <p:spPr>
-          <a:xfrm>
-            <a:off x="7013448" y="2596896"/>
-            <a:ext cx="1298448" cy="310896"/>
-          </a:xfrm>
-          <a:prstGeom prst="rect">
-            <a:avLst/>
-          </a:prstGeom>
-          <a:noFill/>
-        </p:spPr>
-        <p:txBody>
-          <a:bodyPr wrap="none" anchor="ctr" lIns="0" rIns="0" tIns="0" bIns="0">
-            <a:spAutoFit/>
-          </a:bodyPr>
-          <a:lstStyle/>
-          <a:p>
-            <a:pPr algn="ctr">
-              <a:lnSpc>
-                <a:spcPct val="106000"/>
-              </a:lnSpc>
-              <a:spcBef>
-                <a:spcPts val="0"/>
-              </a:spcBef>
-              <a:spcAft>
-                <a:spcPts val="0"/>
-              </a:spcAft>
-            </a:pPr>
-            <a:r>
-              <a:rPr sz="850" b="1">
-                <a:solidFill>
-                  <a:srgbClr val="B80000"/>
-                </a:solidFill>
-                <a:latin typeface="Red Hat Display"/>
-              </a:rPr>
-              <a:t>MEDIA PASS</a:t>
-            </a:r>
-          </a:p>
-        </p:txBody>
-      </p:sp>
-      <p:pic>
-        <p:nvPicPr>
-          <p:cNvPr id="24" name="Picture 23" descr="eye_slate.png"/>
-          <p:cNvPicPr>
-            <a:picLocks noChangeAspect="1"/>
-          </p:cNvPicPr>
-          <p:nvPr/>
-        </p:nvPicPr>
-        <p:blipFill>
-          <a:blip r:embed="rId4"/>
-          <a:stretch>
-            <a:fillRect/>
-          </a:stretch>
-        </p:blipFill>
-        <p:spPr>
-          <a:xfrm>
-            <a:off x="8843619" y="3108960"/>
-            <a:ext cx="475488" cy="475488"/>
-          </a:xfrm>
-          <a:prstGeom prst="rect">
-            <a:avLst/>
-          </a:prstGeom>
-        </p:spPr>
-      </p:pic>
-      <p:sp>
-        <p:nvSpPr>
-          <p:cNvPr id="25" name="TextBox 24"/>
-          <p:cNvSpPr txBox="1"/>
-          <p:nvPr/>
-        </p:nvSpPr>
-        <p:spPr>
-          <a:xfrm>
-            <a:off x="7050024" y="3721608"/>
-            <a:ext cx="4062679" cy="1481328"/>
-          </a:xfrm>
-          <a:prstGeom prst="rect">
-            <a:avLst/>
-          </a:prstGeom>
-          <a:noFill/>
-        </p:spPr>
-        <p:txBody>
-          <a:bodyPr wrap="square" anchor="t" lIns="0" rIns="0" tIns="0" bIns="0">
-            <a:spAutoFit/>
-          </a:bodyPr>
-          <a:lstStyle/>
-          <a:p>
-            <a:pPr algn="l">
-              <a:lnSpc>
-                <a:spcPct val="120000"/>
-              </a:lnSpc>
-              <a:spcBef>
-                <a:spcPts val="0"/>
-              </a:spcBef>
-              <a:spcAft>
-                <a:spcPts val="0"/>
-              </a:spcAft>
-            </a:pPr>
-            <a:r>
-              <a:rPr sz="950" b="0">
-                <a:solidFill>
-                  <a:srgbClr val="8A9099"/>
-                </a:solidFill>
-                <a:latin typeface="Red Hat Text"/>
-              </a:rPr>
-              <a:t>A push/pull round-trip loop — local .tgz → helm push → registry &lt;namespace&gt;/parasol-notifications:0.1.0 → helm pull → same sha256 digest highlighted on both ends. A small "charts/ subpath = 401" strike-through note.</a:t>
             </a:r>
           </a:p>
         </p:txBody>
@@ -9967,7 +9990,7 @@
         <p:spPr>
           <a:xfrm>
             <a:off x="841248" y="2670048"/>
-            <a:ext cx="5715000" cy="530352"/>
+            <a:ext cx="4160520" cy="475488"/>
           </a:xfrm>
           <a:prstGeom prst="roundRect">
             <a:avLst>
@@ -10022,8 +10045,8 @@
         </p:blipFill>
         <p:spPr>
           <a:xfrm>
-            <a:off x="987552" y="2816352"/>
-            <a:ext cx="237744" cy="237744"/>
+            <a:off x="969264" y="2807208"/>
+            <a:ext cx="201168" cy="201168"/>
           </a:xfrm>
           <a:prstGeom prst="rect">
             <a:avLst/>
@@ -10038,8 +10061,8 @@
         </p:nvSpPr>
         <p:spPr>
           <a:xfrm>
-            <a:off x="1353312" y="2670048"/>
-            <a:ext cx="5029200" cy="530352"/>
+            <a:off x="1280160" y="2670048"/>
+            <a:ext cx="3593591" cy="475488"/>
           </a:xfrm>
           <a:prstGeom prst="rect">
             <a:avLst/>
@@ -10064,7 +10087,7 @@
               </a:spcAft>
             </a:pPr>
             <a:r>
-              <a:rPr sz="1200" b="0">
+              <a:rPr sz="1050" b="0">
                 <a:solidFill>
                   <a:srgbClr val="1A1A1A"/>
                 </a:solidFill>
@@ -10083,8 +10106,8 @@
         </p:nvSpPr>
         <p:spPr>
           <a:xfrm>
-            <a:off x="841248" y="3273552"/>
-            <a:ext cx="5715000" cy="530352"/>
+            <a:off x="841248" y="3218688"/>
+            <a:ext cx="4160520" cy="475488"/>
           </a:xfrm>
           <a:prstGeom prst="roundRect">
             <a:avLst>
@@ -10139,8 +10162,8 @@
         </p:blipFill>
         <p:spPr>
           <a:xfrm>
-            <a:off x="987552" y="3419856"/>
-            <a:ext cx="237744" cy="237744"/>
+            <a:off x="969264" y="3355848"/>
+            <a:ext cx="201168" cy="201168"/>
           </a:xfrm>
           <a:prstGeom prst="rect">
             <a:avLst/>
@@ -10155,8 +10178,8 @@
         </p:nvSpPr>
         <p:spPr>
           <a:xfrm>
-            <a:off x="1353312" y="3273552"/>
-            <a:ext cx="5029200" cy="530352"/>
+            <a:off x="1280160" y="3218688"/>
+            <a:ext cx="3593591" cy="475488"/>
           </a:xfrm>
           <a:prstGeom prst="rect">
             <a:avLst/>
@@ -10181,7 +10204,7 @@
               </a:spcAft>
             </a:pPr>
             <a:r>
-              <a:rPr sz="1200" b="0">
+              <a:rPr sz="1050" b="0">
                 <a:solidFill>
                   <a:srgbClr val="1A1A1A"/>
                 </a:solidFill>
@@ -10200,8 +10223,8 @@
         </p:nvSpPr>
         <p:spPr>
           <a:xfrm>
-            <a:off x="841248" y="3877056"/>
-            <a:ext cx="5715000" cy="530352"/>
+            <a:off x="841248" y="3767328"/>
+            <a:ext cx="4160520" cy="475488"/>
           </a:xfrm>
           <a:prstGeom prst="roundRect">
             <a:avLst>
@@ -10256,8 +10279,8 @@
         </p:blipFill>
         <p:spPr>
           <a:xfrm>
-            <a:off x="987552" y="4023360"/>
-            <a:ext cx="237744" cy="237744"/>
+            <a:off x="969264" y="3904487"/>
+            <a:ext cx="201168" cy="201168"/>
           </a:xfrm>
           <a:prstGeom prst="rect">
             <a:avLst/>
@@ -10272,8 +10295,8 @@
         </p:nvSpPr>
         <p:spPr>
           <a:xfrm>
-            <a:off x="1353312" y="3877056"/>
-            <a:ext cx="5029200" cy="530352"/>
+            <a:off x="1280160" y="3767328"/>
+            <a:ext cx="3593591" cy="475488"/>
           </a:xfrm>
           <a:prstGeom prst="rect">
             <a:avLst/>
@@ -10298,7 +10321,7 @@
               </a:spcAft>
             </a:pPr>
             <a:r>
-              <a:rPr sz="1200" b="0">
+              <a:rPr sz="1050" b="0">
                 <a:solidFill>
                   <a:srgbClr val="1A1A1A"/>
                 </a:solidFill>
@@ -10317,8 +10340,8 @@
         </p:nvSpPr>
         <p:spPr>
           <a:xfrm>
-            <a:off x="841248" y="4480560"/>
-            <a:ext cx="5715000" cy="530352"/>
+            <a:off x="841248" y="4315968"/>
+            <a:ext cx="4160520" cy="475488"/>
           </a:xfrm>
           <a:prstGeom prst="roundRect">
             <a:avLst>
@@ -10373,8 +10396,8 @@
         </p:blipFill>
         <p:spPr>
           <a:xfrm>
-            <a:off x="987552" y="4626864"/>
-            <a:ext cx="237744" cy="237744"/>
+            <a:off x="969264" y="4453127"/>
+            <a:ext cx="201168" cy="201168"/>
           </a:xfrm>
           <a:prstGeom prst="rect">
             <a:avLst/>
@@ -10389,8 +10412,8 @@
         </p:nvSpPr>
         <p:spPr>
           <a:xfrm>
-            <a:off x="1353312" y="4480560"/>
-            <a:ext cx="5029200" cy="530352"/>
+            <a:off x="1280160" y="4315968"/>
+            <a:ext cx="3593591" cy="475488"/>
           </a:xfrm>
           <a:prstGeom prst="rect">
             <a:avLst/>
@@ -10415,7 +10438,7 @@
               </a:spcAft>
             </a:pPr>
             <a:r>
-              <a:rPr sz="1200" b="0">
+              <a:rPr sz="1050" b="0">
                 <a:solidFill>
                   <a:srgbClr val="1A1A1A"/>
                 </a:solidFill>
@@ -10434,8 +10457,8 @@
         </p:nvSpPr>
         <p:spPr>
           <a:xfrm>
-            <a:off x="841248" y="5084064"/>
-            <a:ext cx="5715000" cy="530352"/>
+            <a:off x="841248" y="4864607"/>
+            <a:ext cx="4160520" cy="475488"/>
           </a:xfrm>
           <a:prstGeom prst="roundRect">
             <a:avLst>
@@ -10490,8 +10513,8 @@
         </p:blipFill>
         <p:spPr>
           <a:xfrm>
-            <a:off x="987552" y="5230368"/>
-            <a:ext cx="237744" cy="237744"/>
+            <a:off x="969264" y="5001767"/>
+            <a:ext cx="201168" cy="201168"/>
           </a:xfrm>
           <a:prstGeom prst="rect">
             <a:avLst/>
@@ -10506,8 +10529,8 @@
         </p:nvSpPr>
         <p:spPr>
           <a:xfrm>
-            <a:off x="1353312" y="5084064"/>
-            <a:ext cx="5029200" cy="530352"/>
+            <a:off x="1280160" y="4864607"/>
+            <a:ext cx="3593591" cy="475488"/>
           </a:xfrm>
           <a:prstGeom prst="rect">
             <a:avLst/>
@@ -10532,7 +10555,7 @@
               </a:spcAft>
             </a:pPr>
             <a:r>
-              <a:rPr sz="1200" b="0">
+              <a:rPr sz="1050" b="0">
                 <a:solidFill>
                   <a:srgbClr val="1A1A1A"/>
                 </a:solidFill>
@@ -10551,8 +10574,8 @@
         </p:nvSpPr>
         <p:spPr>
           <a:xfrm>
-            <a:off x="6812280" y="2670048"/>
-            <a:ext cx="4538167" cy="2944368"/>
+            <a:off x="5385816" y="2670048"/>
+            <a:ext cx="2201903" cy="3383280"/>
           </a:xfrm>
           <a:prstGeom prst="roundRect">
             <a:avLst>
@@ -10591,100 +10614,9 @@
           </a:p>
         </p:txBody>
       </p:sp>
-      <p:sp>
-        <p:nvSpPr>
-          <p:cNvPr id="23" name="Rounded Rectangle 22"/>
-          <p:cNvSpPr/>
-          <p:nvPr/>
-        </p:nvSpPr>
-        <p:spPr>
-          <a:xfrm>
-            <a:off x="7013448" y="2871216"/>
-            <a:ext cx="1298448" cy="310896"/>
-          </a:xfrm>
-          <a:prstGeom prst="roundRect">
-            <a:avLst>
-              <a:gd name="adj" fmla="val 50000"/>
-            </a:avLst>
-          </a:prstGeom>
-          <a:solidFill>
-            <a:srgbClr val="FCECEC"/>
-          </a:solidFill>
-          <a:ln>
-            <a:noFill/>
-          </a:ln>
-          <a:effectLst/>
-        </p:spPr>
-        <p:style>
-          <a:lnRef idx="1">
-            <a:schemeClr val="accent1"/>
-          </a:lnRef>
-          <a:fillRef idx="3">
-            <a:schemeClr val="accent1"/>
-          </a:fillRef>
-          <a:effectRef idx="2">
-            <a:schemeClr val="accent1"/>
-          </a:effectRef>
-          <a:fontRef idx="minor">
-            <a:schemeClr val="lt1"/>
-          </a:fontRef>
-        </p:style>
-        <p:txBody>
-          <a:bodyPr rtlCol="0" anchor="ctr"/>
-          <a:lstStyle/>
-          <a:p>
-            <a:pPr algn="ctr"/>
-          </a:p>
-        </p:txBody>
-      </p:sp>
-      <p:sp>
-        <p:nvSpPr>
-          <p:cNvPr id="24" name="TextBox 23"/>
-          <p:cNvSpPr txBox="1"/>
-          <p:nvPr/>
-        </p:nvSpPr>
-        <p:spPr>
-          <a:xfrm>
-            <a:off x="7013448" y="2871216"/>
-            <a:ext cx="1298448" cy="310896"/>
-          </a:xfrm>
-          <a:prstGeom prst="rect">
-            <a:avLst/>
-          </a:prstGeom>
-          <a:noFill/>
-        </p:spPr>
-        <p:txBody>
-          <a:bodyPr wrap="none" anchor="ctr" lIns="0" rIns="0" tIns="0" bIns="0">
-            <a:spAutoFit/>
-          </a:bodyPr>
-          <a:lstStyle/>
-          <a:p>
-            <a:pPr algn="ctr">
-              <a:lnSpc>
-                <a:spcPct val="106000"/>
-              </a:lnSpc>
-              <a:spcBef>
-                <a:spcPts val="0"/>
-              </a:spcBef>
-              <a:spcAft>
-                <a:spcPts val="0"/>
-              </a:spcAft>
-            </a:pPr>
-            <a:r>
-              <a:rPr sz="850" b="1">
-                <a:solidFill>
-                  <a:srgbClr val="B80000"/>
-                </a:solidFill>
-                <a:latin typeface="Red Hat Display"/>
-              </a:rPr>
-              <a:t>MEDIA PASS</a:t>
-            </a:r>
-          </a:p>
-        </p:txBody>
-      </p:sp>
       <p:pic>
         <p:nvPicPr>
-          <p:cNvPr id="25" name="Picture 24" descr="eye_slate.png"/>
+          <p:cNvPr id="23" name="Picture 22" descr="02-olm-anatomy.png"/>
           <p:cNvPicPr>
             <a:picLocks noChangeAspect="1"/>
           </p:cNvPicPr>
@@ -10698,62 +10630,17 @@
         </p:blipFill>
         <p:spPr>
           <a:xfrm>
-            <a:off x="8843619" y="3383280"/>
-            <a:ext cx="475488" cy="475488"/>
+            <a:off x="5532120" y="2816352"/>
+            <a:ext cx="1909295" cy="3090672"/>
           </a:xfrm>
           <a:prstGeom prst="rect">
             <a:avLst/>
           </a:prstGeom>
         </p:spPr>
       </p:pic>
-      <p:sp>
-        <p:nvSpPr>
-          <p:cNvPr id="26" name="TextBox 25"/>
-          <p:cNvSpPr txBox="1"/>
-          <p:nvPr/>
-        </p:nvSpPr>
-        <p:spPr>
-          <a:xfrm>
-            <a:off x="7050024" y="3995928"/>
-            <a:ext cx="4062679" cy="1481328"/>
-          </a:xfrm>
-          <a:prstGeom prst="rect">
-            <a:avLst/>
-          </a:prstGeom>
-          <a:noFill/>
-        </p:spPr>
-        <p:txBody>
-          <a:bodyPr wrap="square" anchor="t" lIns="0" rIns="0" tIns="0" bIns="0">
-            <a:spAutoFit/>
-          </a:bodyPr>
-          <a:lstStyle/>
-          <a:p>
-            <a:pPr algn="l">
-              <a:lnSpc>
-                <a:spcPct val="120000"/>
-              </a:lnSpc>
-              <a:spcBef>
-                <a:spcPts val="0"/>
-              </a:spcBef>
-              <a:spcAft>
-                <a:spcPts val="0"/>
-              </a:spcAft>
-            </a:pPr>
-            <a:r>
-              <a:rPr sz="950" b="0">
-                <a:solidFill>
-                  <a:srgbClr val="8A9099"/>
-                </a:solidFill>
-                <a:latin typeface="Red Hat Text"/>
-              </a:rPr>
-              <a:t>Reuse concept diagram packaging-distributing-...-02-olm-anatomy.svg — the top-down chain CatalogSource → PackageManifest → Subscription → InstallPlan → CSV → operator Pod, with a side note "OLM v1: ClusterCatalog + ClusterExtension (the direction)."</a:t>
-            </a:r>
-          </a:p>
-        </p:txBody>
-      </p:sp>
       <p:cxnSp>
         <p:nvCxnSpPr>
-          <p:cNvPr id="27" name="Connector 26"/>
+          <p:cNvPr id="24" name="Connector 23"/>
           <p:cNvCxnSpPr/>
           <p:nvPr/>
         </p:nvCxnSpPr>
@@ -10789,7 +10676,7 @@
       </p:cxnSp>
       <p:sp>
         <p:nvSpPr>
-          <p:cNvPr id="28" name="TextBox 27"/>
+          <p:cNvPr id="25" name="TextBox 24"/>
           <p:cNvSpPr txBox="1"/>
           <p:nvPr/>
         </p:nvSpPr>
@@ -10834,7 +10721,7 @@
       </p:sp>
       <p:sp>
         <p:nvSpPr>
-          <p:cNvPr id="29" name="TextBox 28"/>
+          <p:cNvPr id="26" name="TextBox 25"/>
           <p:cNvSpPr txBox="1"/>
           <p:nvPr/>
         </p:nvSpPr>
@@ -11099,11 +10986,11 @@
         <p:spPr>
           <a:xfrm>
             <a:off x="841248" y="2670048"/>
-            <a:ext cx="5715000" cy="530352"/>
+            <a:ext cx="5138928" cy="786384"/>
           </a:xfrm>
           <a:prstGeom prst="roundRect">
             <a:avLst>
-              <a:gd name="adj" fmla="val 6000"/>
+              <a:gd name="adj" fmla="val 7000"/>
             </a:avLst>
           </a:prstGeom>
           <a:solidFill>
@@ -11138,9 +11025,55 @@
           </a:p>
         </p:txBody>
       </p:sp>
+      <p:sp>
+        <p:nvSpPr>
+          <p:cNvPr id="8" name="Rounded Rectangle 7"/>
+          <p:cNvSpPr/>
+          <p:nvPr/>
+        </p:nvSpPr>
+        <p:spPr>
+          <a:xfrm>
+            <a:off x="987552" y="2807208"/>
+            <a:ext cx="512064" cy="512064"/>
+          </a:xfrm>
+          <a:prstGeom prst="roundRect">
+            <a:avLst>
+              <a:gd name="adj" fmla="val 26000"/>
+            </a:avLst>
+          </a:prstGeom>
+          <a:solidFill>
+            <a:srgbClr val="EE0000"/>
+          </a:solidFill>
+          <a:ln>
+            <a:noFill/>
+          </a:ln>
+          <a:effectLst/>
+        </p:spPr>
+        <p:style>
+          <a:lnRef idx="1">
+            <a:schemeClr val="accent1"/>
+          </a:lnRef>
+          <a:fillRef idx="3">
+            <a:schemeClr val="accent1"/>
+          </a:fillRef>
+          <a:effectRef idx="2">
+            <a:schemeClr val="accent1"/>
+          </a:effectRef>
+          <a:fontRef idx="minor">
+            <a:schemeClr val="lt1"/>
+          </a:fontRef>
+        </p:style>
+        <p:txBody>
+          <a:bodyPr rtlCol="0" anchor="ctr"/>
+          <a:lstStyle/>
+          <a:p>
+            <a:pPr algn="ctr"/>
+          </a:p>
+        </p:txBody>
+      </p:sp>
       <p:pic>
         <p:nvPicPr>
-          <p:cNvPr id="8" name="Picture 7" descr="check_steel.png"/>
+          <p:cNvPr id="9" name="Picture 8" descr="check_white.png"/>
           <p:cNvPicPr>
             <a:picLocks noChangeAspect="1"/>
           </p:cNvPicPr>
@@ -11154,8 +11087,8 @@
         </p:blipFill>
         <p:spPr>
           <a:xfrm>
-            <a:off x="987552" y="2816352"/>
-            <a:ext cx="237744" cy="237744"/>
+            <a:off x="1110447" y="2930103"/>
+            <a:ext cx="266273" cy="266273"/>
           </a:xfrm>
           <a:prstGeom prst="rect">
             <a:avLst/>
@@ -11164,14 +11097,14 @@
       </p:pic>
       <p:sp>
         <p:nvSpPr>
-          <p:cNvPr id="9" name="TextBox 8"/>
+          <p:cNvPr id="10" name="TextBox 9"/>
           <p:cNvSpPr txBox="1"/>
           <p:nvPr/>
         </p:nvSpPr>
         <p:spPr>
           <a:xfrm>
-            <a:off x="1353312" y="2670048"/>
-            <a:ext cx="5029200" cy="530352"/>
+            <a:off x="1627632" y="2670048"/>
+            <a:ext cx="4206240" cy="786384"/>
           </a:xfrm>
           <a:prstGeom prst="rect">
             <a:avLst/>
@@ -11196,7 +11129,7 @@
               </a:spcAft>
             </a:pPr>
             <a:r>
-              <a:rPr sz="1200" b="0">
+              <a:rPr sz="1150" b="0">
                 <a:solidFill>
                   <a:srgbClr val="1A1A1A"/>
                 </a:solidFill>
@@ -11209,18 +11142,18 @@
       </p:sp>
       <p:sp>
         <p:nvSpPr>
-          <p:cNvPr id="10" name="Rounded Rectangle 9"/>
+          <p:cNvPr id="11" name="Rounded Rectangle 10"/>
           <p:cNvSpPr/>
           <p:nvPr/>
         </p:nvSpPr>
         <p:spPr>
           <a:xfrm>
-            <a:off x="841248" y="3273552"/>
-            <a:ext cx="5715000" cy="530352"/>
+            <a:off x="6254496" y="2670048"/>
+            <a:ext cx="5138928" cy="786384"/>
           </a:xfrm>
           <a:prstGeom prst="roundRect">
             <a:avLst>
-              <a:gd name="adj" fmla="val 6000"/>
+              <a:gd name="adj" fmla="val 7000"/>
             </a:avLst>
           </a:prstGeom>
           <a:solidFill>
@@ -11255,9 +11188,55 @@
           </a:p>
         </p:txBody>
       </p:sp>
+      <p:sp>
+        <p:nvSpPr>
+          <p:cNvPr id="12" name="Rounded Rectangle 11"/>
+          <p:cNvSpPr/>
+          <p:nvPr/>
+        </p:nvSpPr>
+        <p:spPr>
+          <a:xfrm>
+            <a:off x="6400800" y="2807208"/>
+            <a:ext cx="512064" cy="512064"/>
+          </a:xfrm>
+          <a:prstGeom prst="roundRect">
+            <a:avLst>
+              <a:gd name="adj" fmla="val 26000"/>
+            </a:avLst>
+          </a:prstGeom>
+          <a:solidFill>
+            <a:srgbClr val="EE0000"/>
+          </a:solidFill>
+          <a:ln>
+            <a:noFill/>
+          </a:ln>
+          <a:effectLst/>
+        </p:spPr>
+        <p:style>
+          <a:lnRef idx="1">
+            <a:schemeClr val="accent1"/>
+          </a:lnRef>
+          <a:fillRef idx="3">
+            <a:schemeClr val="accent1"/>
+          </a:fillRef>
+          <a:effectRef idx="2">
+            <a:schemeClr val="accent1"/>
+          </a:effectRef>
+          <a:fontRef idx="minor">
+            <a:schemeClr val="lt1"/>
+          </a:fontRef>
+        </p:style>
+        <p:txBody>
+          <a:bodyPr rtlCol="0" anchor="ctr"/>
+          <a:lstStyle/>
+          <a:p>
+            <a:pPr algn="ctr"/>
+          </a:p>
+        </p:txBody>
+      </p:sp>
       <p:pic>
         <p:nvPicPr>
-          <p:cNvPr id="11" name="Picture 10" descr="check_steel.png"/>
+          <p:cNvPr id="13" name="Picture 12" descr="check_white.png"/>
           <p:cNvPicPr>
             <a:picLocks noChangeAspect="1"/>
           </p:cNvPicPr>
@@ -11271,8 +11250,8 @@
         </p:blipFill>
         <p:spPr>
           <a:xfrm>
-            <a:off x="987552" y="3419856"/>
-            <a:ext cx="237744" cy="237744"/>
+            <a:off x="6523695" y="2930103"/>
+            <a:ext cx="266273" cy="266273"/>
           </a:xfrm>
           <a:prstGeom prst="rect">
             <a:avLst/>
@@ -11281,14 +11260,14 @@
       </p:pic>
       <p:sp>
         <p:nvSpPr>
-          <p:cNvPr id="12" name="TextBox 11"/>
+          <p:cNvPr id="14" name="TextBox 13"/>
           <p:cNvSpPr txBox="1"/>
           <p:nvPr/>
         </p:nvSpPr>
         <p:spPr>
           <a:xfrm>
-            <a:off x="1353312" y="3273552"/>
-            <a:ext cx="5029200" cy="530352"/>
+            <a:off x="7040880" y="2670048"/>
+            <a:ext cx="4206240" cy="786384"/>
           </a:xfrm>
           <a:prstGeom prst="rect">
             <a:avLst/>
@@ -11313,7 +11292,7 @@
               </a:spcAft>
             </a:pPr>
             <a:r>
-              <a:rPr sz="1200" b="0">
+              <a:rPr sz="1150" b="0">
                 <a:solidFill>
                   <a:srgbClr val="1A1A1A"/>
                 </a:solidFill>
@@ -11326,18 +11305,18 @@
       </p:sp>
       <p:sp>
         <p:nvSpPr>
-          <p:cNvPr id="13" name="Rounded Rectangle 12"/>
+          <p:cNvPr id="15" name="Rounded Rectangle 14"/>
           <p:cNvSpPr/>
           <p:nvPr/>
         </p:nvSpPr>
         <p:spPr>
           <a:xfrm>
-            <a:off x="841248" y="3877056"/>
-            <a:ext cx="5715000" cy="530352"/>
+            <a:off x="841248" y="3602736"/>
+            <a:ext cx="5138928" cy="786384"/>
           </a:xfrm>
           <a:prstGeom prst="roundRect">
             <a:avLst>
-              <a:gd name="adj" fmla="val 6000"/>
+              <a:gd name="adj" fmla="val 7000"/>
             </a:avLst>
           </a:prstGeom>
           <a:solidFill>
@@ -11372,9 +11351,55 @@
           </a:p>
         </p:txBody>
       </p:sp>
+      <p:sp>
+        <p:nvSpPr>
+          <p:cNvPr id="16" name="Rounded Rectangle 15"/>
+          <p:cNvSpPr/>
+          <p:nvPr/>
+        </p:nvSpPr>
+        <p:spPr>
+          <a:xfrm>
+            <a:off x="987552" y="3739896"/>
+            <a:ext cx="512064" cy="512064"/>
+          </a:xfrm>
+          <a:prstGeom prst="roundRect">
+            <a:avLst>
+              <a:gd name="adj" fmla="val 26000"/>
+            </a:avLst>
+          </a:prstGeom>
+          <a:solidFill>
+            <a:srgbClr val="EE0000"/>
+          </a:solidFill>
+          <a:ln>
+            <a:noFill/>
+          </a:ln>
+          <a:effectLst/>
+        </p:spPr>
+        <p:style>
+          <a:lnRef idx="1">
+            <a:schemeClr val="accent1"/>
+          </a:lnRef>
+          <a:fillRef idx="3">
+            <a:schemeClr val="accent1"/>
+          </a:fillRef>
+          <a:effectRef idx="2">
+            <a:schemeClr val="accent1"/>
+          </a:effectRef>
+          <a:fontRef idx="minor">
+            <a:schemeClr val="lt1"/>
+          </a:fontRef>
+        </p:style>
+        <p:txBody>
+          <a:bodyPr rtlCol="0" anchor="ctr"/>
+          <a:lstStyle/>
+          <a:p>
+            <a:pPr algn="ctr"/>
+          </a:p>
+        </p:txBody>
+      </p:sp>
       <p:pic>
         <p:nvPicPr>
-          <p:cNvPr id="14" name="Picture 13" descr="check_steel.png"/>
+          <p:cNvPr id="17" name="Picture 16" descr="check_white.png"/>
           <p:cNvPicPr>
             <a:picLocks noChangeAspect="1"/>
           </p:cNvPicPr>
@@ -11388,8 +11413,8 @@
         </p:blipFill>
         <p:spPr>
           <a:xfrm>
-            <a:off x="987552" y="4023360"/>
-            <a:ext cx="237744" cy="237744"/>
+            <a:off x="1110447" y="3862791"/>
+            <a:ext cx="266273" cy="266273"/>
           </a:xfrm>
           <a:prstGeom prst="rect">
             <a:avLst/>
@@ -11398,14 +11423,14 @@
       </p:pic>
       <p:sp>
         <p:nvSpPr>
-          <p:cNvPr id="15" name="TextBox 14"/>
+          <p:cNvPr id="18" name="TextBox 17"/>
           <p:cNvSpPr txBox="1"/>
           <p:nvPr/>
         </p:nvSpPr>
         <p:spPr>
           <a:xfrm>
-            <a:off x="1353312" y="3877056"/>
-            <a:ext cx="5029200" cy="530352"/>
+            <a:off x="1627632" y="3602736"/>
+            <a:ext cx="4206240" cy="786384"/>
           </a:xfrm>
           <a:prstGeom prst="rect">
             <a:avLst/>
@@ -11430,7 +11455,7 @@
               </a:spcAft>
             </a:pPr>
             <a:r>
-              <a:rPr sz="1200" b="0">
+              <a:rPr sz="1150" b="0">
                 <a:solidFill>
                   <a:srgbClr val="1A1A1A"/>
                 </a:solidFill>
@@ -11443,18 +11468,18 @@
       </p:sp>
       <p:sp>
         <p:nvSpPr>
-          <p:cNvPr id="16" name="Rounded Rectangle 15"/>
+          <p:cNvPr id="19" name="Rounded Rectangle 18"/>
           <p:cNvSpPr/>
           <p:nvPr/>
         </p:nvSpPr>
         <p:spPr>
           <a:xfrm>
-            <a:off x="841248" y="4480560"/>
-            <a:ext cx="5715000" cy="530352"/>
+            <a:off x="6254496" y="3602736"/>
+            <a:ext cx="5138928" cy="786384"/>
           </a:xfrm>
           <a:prstGeom prst="roundRect">
             <a:avLst>
-              <a:gd name="adj" fmla="val 6000"/>
+              <a:gd name="adj" fmla="val 7000"/>
             </a:avLst>
           </a:prstGeom>
           <a:solidFill>
@@ -11489,9 +11514,55 @@
           </a:p>
         </p:txBody>
       </p:sp>
+      <p:sp>
+        <p:nvSpPr>
+          <p:cNvPr id="20" name="Rounded Rectangle 19"/>
+          <p:cNvSpPr/>
+          <p:nvPr/>
+        </p:nvSpPr>
+        <p:spPr>
+          <a:xfrm>
+            <a:off x="6400800" y="3739896"/>
+            <a:ext cx="512064" cy="512064"/>
+          </a:xfrm>
+          <a:prstGeom prst="roundRect">
+            <a:avLst>
+              <a:gd name="adj" fmla="val 26000"/>
+            </a:avLst>
+          </a:prstGeom>
+          <a:solidFill>
+            <a:srgbClr val="EE0000"/>
+          </a:solidFill>
+          <a:ln>
+            <a:noFill/>
+          </a:ln>
+          <a:effectLst/>
+        </p:spPr>
+        <p:style>
+          <a:lnRef idx="1">
+            <a:schemeClr val="accent1"/>
+          </a:lnRef>
+          <a:fillRef idx="3">
+            <a:schemeClr val="accent1"/>
+          </a:fillRef>
+          <a:effectRef idx="2">
+            <a:schemeClr val="accent1"/>
+          </a:effectRef>
+          <a:fontRef idx="minor">
+            <a:schemeClr val="lt1"/>
+          </a:fontRef>
+        </p:style>
+        <p:txBody>
+          <a:bodyPr rtlCol="0" anchor="ctr"/>
+          <a:lstStyle/>
+          <a:p>
+            <a:pPr algn="ctr"/>
+          </a:p>
+        </p:txBody>
+      </p:sp>
       <p:pic>
         <p:nvPicPr>
-          <p:cNvPr id="17" name="Picture 16" descr="check_steel.png"/>
+          <p:cNvPr id="21" name="Picture 20" descr="check_white.png"/>
           <p:cNvPicPr>
             <a:picLocks noChangeAspect="1"/>
           </p:cNvPicPr>
@@ -11505,8 +11576,8 @@
         </p:blipFill>
         <p:spPr>
           <a:xfrm>
-            <a:off x="987552" y="4626864"/>
-            <a:ext cx="237744" cy="237744"/>
+            <a:off x="6523695" y="3862791"/>
+            <a:ext cx="266273" cy="266273"/>
           </a:xfrm>
           <a:prstGeom prst="rect">
             <a:avLst/>
@@ -11515,14 +11586,14 @@
       </p:pic>
       <p:sp>
         <p:nvSpPr>
-          <p:cNvPr id="18" name="TextBox 17"/>
+          <p:cNvPr id="22" name="TextBox 21"/>
           <p:cNvSpPr txBox="1"/>
           <p:nvPr/>
         </p:nvSpPr>
         <p:spPr>
           <a:xfrm>
-            <a:off x="1353312" y="4480560"/>
-            <a:ext cx="5029200" cy="530352"/>
+            <a:off x="7040880" y="3602736"/>
+            <a:ext cx="4206240" cy="786384"/>
           </a:xfrm>
           <a:prstGeom prst="rect">
             <a:avLst/>
@@ -11547,7 +11618,7 @@
               </a:spcAft>
             </a:pPr>
             <a:r>
-              <a:rPr sz="1200" b="0">
+              <a:rPr sz="1150" b="0">
                 <a:solidFill>
                   <a:srgbClr val="1A1A1A"/>
                 </a:solidFill>
@@ -11560,18 +11631,18 @@
       </p:sp>
       <p:sp>
         <p:nvSpPr>
-          <p:cNvPr id="19" name="Rounded Rectangle 18"/>
+          <p:cNvPr id="23" name="Rounded Rectangle 22"/>
           <p:cNvSpPr/>
           <p:nvPr/>
         </p:nvSpPr>
         <p:spPr>
           <a:xfrm>
-            <a:off x="841248" y="5084064"/>
-            <a:ext cx="5715000" cy="530352"/>
+            <a:off x="841248" y="4535424"/>
+            <a:ext cx="5138928" cy="786384"/>
           </a:xfrm>
           <a:prstGeom prst="roundRect">
             <a:avLst>
-              <a:gd name="adj" fmla="val 6000"/>
+              <a:gd name="adj" fmla="val 7000"/>
             </a:avLst>
           </a:prstGeom>
           <a:solidFill>
@@ -11606,9 +11677,55 @@
           </a:p>
         </p:txBody>
       </p:sp>
+      <p:sp>
+        <p:nvSpPr>
+          <p:cNvPr id="24" name="Rounded Rectangle 23"/>
+          <p:cNvSpPr/>
+          <p:nvPr/>
+        </p:nvSpPr>
+        <p:spPr>
+          <a:xfrm>
+            <a:off x="987552" y="4672584"/>
+            <a:ext cx="512064" cy="512064"/>
+          </a:xfrm>
+          <a:prstGeom prst="roundRect">
+            <a:avLst>
+              <a:gd name="adj" fmla="val 26000"/>
+            </a:avLst>
+          </a:prstGeom>
+          <a:solidFill>
+            <a:srgbClr val="EE0000"/>
+          </a:solidFill>
+          <a:ln>
+            <a:noFill/>
+          </a:ln>
+          <a:effectLst/>
+        </p:spPr>
+        <p:style>
+          <a:lnRef idx="1">
+            <a:schemeClr val="accent1"/>
+          </a:lnRef>
+          <a:fillRef idx="3">
+            <a:schemeClr val="accent1"/>
+          </a:fillRef>
+          <a:effectRef idx="2">
+            <a:schemeClr val="accent1"/>
+          </a:effectRef>
+          <a:fontRef idx="minor">
+            <a:schemeClr val="lt1"/>
+          </a:fontRef>
+        </p:style>
+        <p:txBody>
+          <a:bodyPr rtlCol="0" anchor="ctr"/>
+          <a:lstStyle/>
+          <a:p>
+            <a:pPr algn="ctr"/>
+          </a:p>
+        </p:txBody>
+      </p:sp>
       <p:pic>
         <p:nvPicPr>
-          <p:cNvPr id="20" name="Picture 19" descr="check_steel.png"/>
+          <p:cNvPr id="25" name="Picture 24" descr="check_white.png"/>
           <p:cNvPicPr>
             <a:picLocks noChangeAspect="1"/>
           </p:cNvPicPr>
@@ -11622,8 +11739,8 @@
         </p:blipFill>
         <p:spPr>
           <a:xfrm>
-            <a:off x="987552" y="5230368"/>
-            <a:ext cx="237744" cy="237744"/>
+            <a:off x="1110447" y="4795479"/>
+            <a:ext cx="266273" cy="266273"/>
           </a:xfrm>
           <a:prstGeom prst="rect">
             <a:avLst/>
@@ -11632,14 +11749,14 @@
       </p:pic>
       <p:sp>
         <p:nvSpPr>
-          <p:cNvPr id="21" name="TextBox 20"/>
+          <p:cNvPr id="26" name="TextBox 25"/>
           <p:cNvSpPr txBox="1"/>
           <p:nvPr/>
         </p:nvSpPr>
         <p:spPr>
           <a:xfrm>
-            <a:off x="1353312" y="5084064"/>
-            <a:ext cx="5029200" cy="530352"/>
+            <a:off x="1627632" y="4535424"/>
+            <a:ext cx="4206240" cy="786384"/>
           </a:xfrm>
           <a:prstGeom prst="rect">
             <a:avLst/>
@@ -11664,7 +11781,7 @@
               </a:spcAft>
             </a:pPr>
             <a:r>
-              <a:rPr sz="1200" b="0">
+              <a:rPr sz="1150" b="0">
                 <a:solidFill>
                   <a:srgbClr val="1A1A1A"/>
                 </a:solidFill>
@@ -11675,16 +11792,310 @@
           </a:p>
         </p:txBody>
       </p:sp>
-      <p:sp>
-        <p:nvSpPr>
-          <p:cNvPr id="22" name="Rounded Rectangle 21"/>
+      <p:cxnSp>
+        <p:nvCxnSpPr>
+          <p:cNvPr id="27" name="Connector 26"/>
+          <p:cNvCxnSpPr/>
+          <p:nvPr/>
+        </p:nvCxnSpPr>
+        <p:spPr>
+          <a:xfrm>
+            <a:off x="841248" y="6437376"/>
+            <a:ext cx="10509199" cy="0"/>
+          </a:xfrm>
+          <a:prstGeom prst="bentConnector3">
+            <a:avLst/>
+          </a:prstGeom>
+          <a:ln w="12700">
+            <a:solidFill>
+              <a:srgbClr val="DDE1E6"/>
+            </a:solidFill>
+          </a:ln>
+          <a:effectLst/>
+        </p:spPr>
+        <p:style>
+          <a:lnRef idx="2">
+            <a:schemeClr val="accent1"/>
+          </a:lnRef>
+          <a:fillRef idx="0">
+            <a:schemeClr val="accent1"/>
+          </a:fillRef>
+          <a:effectRef idx="1">
+            <a:schemeClr val="accent1"/>
+          </a:effectRef>
+          <a:fontRef idx="minor">
+            <a:schemeClr val="tx1"/>
+          </a:fontRef>
+        </p:style>
+      </p:cxnSp>
+      <p:sp>
+        <p:nvSpPr>
+          <p:cNvPr id="28" name="TextBox 27"/>
+          <p:cNvSpPr txBox="1"/>
+          <p:nvPr/>
+        </p:nvSpPr>
+        <p:spPr>
+          <a:xfrm>
+            <a:off x="841248" y="6473952"/>
+            <a:ext cx="7315200" cy="274320"/>
+          </a:xfrm>
+          <a:prstGeom prst="rect">
+            <a:avLst/>
+          </a:prstGeom>
+          <a:noFill/>
+        </p:spPr>
+        <p:txBody>
+          <a:bodyPr wrap="square" anchor="t" lIns="0" rIns="0" tIns="0" bIns="0">
+            <a:spAutoFit/>
+          </a:bodyPr>
+          <a:lstStyle/>
+          <a:p>
+            <a:pPr algn="l">
+              <a:lnSpc>
+                <a:spcPct val="106000"/>
+              </a:lnSpc>
+              <a:spcBef>
+                <a:spcPts val="0"/>
+              </a:spcBef>
+              <a:spcAft>
+                <a:spcPts val="0"/>
+              </a:spcAft>
+            </a:pPr>
+            <a:r>
+              <a:rPr sz="950" b="0">
+                <a:solidFill>
+                  <a:srgbClr val="8A9099"/>
+                </a:solidFill>
+                <a:latin typeface="Red Hat Text"/>
+              </a:rPr>
+              <a:t>CONFIDENTIAL</a:t>
+            </a:r>
+          </a:p>
+        </p:txBody>
+      </p:sp>
+      <p:sp>
+        <p:nvSpPr>
+          <p:cNvPr id="29" name="TextBox 28"/>
+          <p:cNvSpPr txBox="1"/>
+          <p:nvPr/>
+        </p:nvSpPr>
+        <p:spPr>
+          <a:xfrm>
+            <a:off x="10801807" y="6473952"/>
+            <a:ext cx="548640" cy="274320"/>
+          </a:xfrm>
+          <a:prstGeom prst="rect">
+            <a:avLst/>
+          </a:prstGeom>
+          <a:noFill/>
+        </p:spPr>
+        <p:txBody>
+          <a:bodyPr wrap="square" anchor="t" lIns="0" rIns="0" tIns="0" bIns="0">
+            <a:spAutoFit/>
+          </a:bodyPr>
+          <a:lstStyle/>
+          <a:p>
+            <a:pPr algn="r">
+              <a:lnSpc>
+                <a:spcPct val="106000"/>
+              </a:lnSpc>
+              <a:spcBef>
+                <a:spcPts val="0"/>
+              </a:spcBef>
+              <a:spcAft>
+                <a:spcPts val="0"/>
+              </a:spcAft>
+            </a:pPr>
+            <a:r>
+              <a:rPr sz="950" b="0">
+                <a:solidFill>
+                  <a:srgbClr val="8A9099"/>
+                </a:solidFill>
+                <a:latin typeface="Red Hat Text"/>
+              </a:rPr>
+              <a:t>7</a:t>
+            </a:r>
+          </a:p>
+        </p:txBody>
+      </p:sp>
+    </p:spTree>
+  </p:cSld>
+  <p:clrMapOvr>
+    <a:masterClrMapping/>
+  </p:clrMapOvr>
+</p:sld>
+</file>
+
+<file path=ppt/slides/slide9.xml><?xml version="1.0" encoding="utf-8"?>
+<p:sld xmlns:a="http://schemas.openxmlformats.org/drawingml/2006/main" xmlns:p="http://schemas.openxmlformats.org/presentationml/2006/main" xmlns:r="http://schemas.openxmlformats.org/officeDocument/2006/relationships">
+  <p:cSld>
+    <p:spTree>
+      <p:nvGrpSpPr>
+        <p:cNvPr id="1" name=""/>
+        <p:cNvGrpSpPr/>
+        <p:nvPr/>
+      </p:nvGrpSpPr>
+      <p:grpSpPr/>
+      <p:pic>
+        <p:nvPicPr>
+          <p:cNvPr id="2" name="Picture 1" descr="redhat_logo.jpg"/>
+          <p:cNvPicPr>
+            <a:picLocks noChangeAspect="1"/>
+          </p:cNvPicPr>
+          <p:nvPr/>
+        </p:nvPicPr>
+        <p:blipFill>
+          <a:blip r:embed="rId2"/>
+          <a:stretch>
+            <a:fillRect/>
+          </a:stretch>
+        </p:blipFill>
+        <p:spPr>
+          <a:xfrm>
+            <a:off x="10326319" y="475488"/>
+            <a:ext cx="1024128" cy="242248"/>
+          </a:xfrm>
+          <a:prstGeom prst="rect">
+            <a:avLst/>
+          </a:prstGeom>
+        </p:spPr>
+      </p:pic>
+      <p:sp>
+        <p:nvSpPr>
+          <p:cNvPr id="3" name="TextBox 2"/>
+          <p:cNvSpPr txBox="1"/>
+          <p:nvPr/>
+        </p:nvSpPr>
+        <p:spPr>
+          <a:xfrm>
+            <a:off x="841248" y="548640"/>
+            <a:ext cx="8595360" cy="274320"/>
+          </a:xfrm>
+          <a:prstGeom prst="rect">
+            <a:avLst/>
+          </a:prstGeom>
+          <a:noFill/>
+        </p:spPr>
+        <p:txBody>
+          <a:bodyPr wrap="square" anchor="t" lIns="0" rIns="0" tIns="0" bIns="0">
+            <a:spAutoFit/>
+          </a:bodyPr>
+          <a:lstStyle/>
+          <a:p>
+            <a:pPr algn="l">
+              <a:lnSpc>
+                <a:spcPct val="106000"/>
+              </a:lnSpc>
+              <a:spcBef>
+                <a:spcPts val="0"/>
+              </a:spcBef>
+              <a:spcAft>
+                <a:spcPts val="0"/>
+              </a:spcAft>
+            </a:pPr>
+            <a:r>
+              <a:rPr sz="1250" b="1" spc="220">
+                <a:solidFill>
+                  <a:srgbClr val="EE0000"/>
+                </a:solidFill>
+                <a:latin typeface="Red Hat Display"/>
+              </a:rPr>
+              <a:t>M26 · PACKAGING &amp; DISTRIBUTING YOUR APP</a:t>
+            </a:r>
+          </a:p>
+        </p:txBody>
+      </p:sp>
+      <p:sp>
+        <p:nvSpPr>
+          <p:cNvPr id="4" name="TextBox 3"/>
+          <p:cNvSpPr txBox="1"/>
+          <p:nvPr/>
+        </p:nvSpPr>
+        <p:spPr>
+          <a:xfrm>
+            <a:off x="841248" y="877824"/>
+            <a:ext cx="10515600" cy="548640"/>
+          </a:xfrm>
+          <a:prstGeom prst="rect">
+            <a:avLst/>
+          </a:prstGeom>
+          <a:noFill/>
+        </p:spPr>
+        <p:txBody>
+          <a:bodyPr wrap="none" anchor="t" lIns="0" rIns="0" tIns="0" bIns="0">
+            <a:spAutoFit/>
+          </a:bodyPr>
+          <a:lstStyle/>
+          <a:p>
+            <a:pPr algn="l">
+              <a:lnSpc>
+                <a:spcPct val="100000"/>
+              </a:lnSpc>
+              <a:spcBef>
+                <a:spcPts val="0"/>
+              </a:spcBef>
+              <a:spcAft>
+                <a:spcPts val="0"/>
+              </a:spcAft>
+            </a:pPr>
+            <a:r>
+              <a:rPr sz="2500" b="1">
+                <a:solidFill>
+                  <a:srgbClr val="1A1A1A"/>
+                </a:solidFill>
+                <a:latin typeface="Red Hat Display"/>
+              </a:rPr>
+              <a:t>What you built</a:t>
+            </a:r>
+          </a:p>
+        </p:txBody>
+      </p:sp>
+      <p:cxnSp>
+        <p:nvCxnSpPr>
+          <p:cNvPr id="5" name="Connector 4"/>
+          <p:cNvCxnSpPr/>
+          <p:nvPr/>
+        </p:nvCxnSpPr>
+        <p:spPr>
+          <a:xfrm>
+            <a:off x="841248" y="1554480"/>
+            <a:ext cx="1371600" cy="0"/>
+          </a:xfrm>
+          <a:prstGeom prst="bentConnector3">
+            <a:avLst/>
+          </a:prstGeom>
+          <a:ln w="31750">
+            <a:solidFill>
+              <a:srgbClr val="EE0000"/>
+            </a:solidFill>
+          </a:ln>
+          <a:effectLst/>
+        </p:spPr>
+        <p:style>
+          <a:lnRef idx="2">
+            <a:schemeClr val="accent1"/>
+          </a:lnRef>
+          <a:fillRef idx="0">
+            <a:schemeClr val="accent1"/>
+          </a:fillRef>
+          <a:effectRef idx="1">
+            <a:schemeClr val="accent1"/>
+          </a:effectRef>
+          <a:fontRef idx="minor">
+            <a:schemeClr val="tx1"/>
+          </a:fontRef>
+        </p:style>
+      </p:cxnSp>
+      <p:sp>
+        <p:nvSpPr>
+          <p:cNvPr id="6" name="Rounded Rectangle 5"/>
           <p:cNvSpPr/>
           <p:nvPr/>
         </p:nvSpPr>
         <p:spPr>
           <a:xfrm>
-            <a:off x="6812280" y="2670048"/>
-            <a:ext cx="4538167" cy="2944368"/>
+            <a:off x="841248" y="2331720"/>
+            <a:ext cx="10509199" cy="3794760"/>
           </a:xfrm>
           <a:prstGeom prst="roundRect">
             <a:avLst>
@@ -11723,169 +12134,33 @@
           </a:p>
         </p:txBody>
       </p:sp>
-      <p:sp>
-        <p:nvSpPr>
-          <p:cNvPr id="23" name="Rounded Rectangle 22"/>
-          <p:cNvSpPr/>
-          <p:nvPr/>
-        </p:nvSpPr>
-        <p:spPr>
-          <a:xfrm>
-            <a:off x="7013448" y="2871216"/>
-            <a:ext cx="1298448" cy="310896"/>
-          </a:xfrm>
-          <a:prstGeom prst="roundRect">
-            <a:avLst>
-              <a:gd name="adj" fmla="val 50000"/>
-            </a:avLst>
-          </a:prstGeom>
-          <a:solidFill>
-            <a:srgbClr val="FCECEC"/>
-          </a:solidFill>
-          <a:ln>
-            <a:noFill/>
-          </a:ln>
-          <a:effectLst/>
-        </p:spPr>
-        <p:style>
-          <a:lnRef idx="1">
-            <a:schemeClr val="accent1"/>
-          </a:lnRef>
-          <a:fillRef idx="3">
-            <a:schemeClr val="accent1"/>
-          </a:fillRef>
-          <a:effectRef idx="2">
-            <a:schemeClr val="accent1"/>
-          </a:effectRef>
-          <a:fontRef idx="minor">
-            <a:schemeClr val="lt1"/>
-          </a:fontRef>
-        </p:style>
-        <p:txBody>
-          <a:bodyPr rtlCol="0" anchor="ctr"/>
-          <a:lstStyle/>
-          <a:p>
-            <a:pPr algn="ctr"/>
-          </a:p>
-        </p:txBody>
-      </p:sp>
-      <p:sp>
-        <p:nvSpPr>
-          <p:cNvPr id="24" name="TextBox 23"/>
-          <p:cNvSpPr txBox="1"/>
-          <p:nvPr/>
-        </p:nvSpPr>
-        <p:spPr>
-          <a:xfrm>
-            <a:off x="7013448" y="2871216"/>
-            <a:ext cx="1298448" cy="310896"/>
-          </a:xfrm>
-          <a:prstGeom prst="rect">
-            <a:avLst/>
-          </a:prstGeom>
-          <a:noFill/>
-        </p:spPr>
-        <p:txBody>
-          <a:bodyPr wrap="none" anchor="ctr" lIns="0" rIns="0" tIns="0" bIns="0">
-            <a:spAutoFit/>
-          </a:bodyPr>
-          <a:lstStyle/>
-          <a:p>
-            <a:pPr algn="ctr">
-              <a:lnSpc>
-                <a:spcPct val="106000"/>
-              </a:lnSpc>
-              <a:spcBef>
-                <a:spcPts val="0"/>
-              </a:spcBef>
-              <a:spcAft>
-                <a:spcPts val="0"/>
-              </a:spcAft>
-            </a:pPr>
-            <a:r>
-              <a:rPr sz="850" b="1">
-                <a:solidFill>
-                  <a:srgbClr val="B80000"/>
-                </a:solidFill>
-                <a:latin typeface="Red Hat Display"/>
-              </a:rPr>
-              <a:t>MEDIA PASS</a:t>
-            </a:r>
-          </a:p>
-        </p:txBody>
-      </p:sp>
       <p:pic>
         <p:nvPicPr>
-          <p:cNvPr id="25" name="Picture 24" descr="eye_slate.png"/>
+          <p:cNvPr id="7" name="Picture 6" descr="03-what-you-built.png"/>
           <p:cNvPicPr>
             <a:picLocks noChangeAspect="1"/>
           </p:cNvPicPr>
           <p:nvPr/>
         </p:nvPicPr>
         <p:blipFill>
-          <a:blip r:embed="rId4"/>
+          <a:blip r:embed="rId3"/>
           <a:stretch>
             <a:fillRect/>
           </a:stretch>
         </p:blipFill>
         <p:spPr>
           <a:xfrm>
-            <a:off x="8843619" y="3383280"/>
-            <a:ext cx="475488" cy="475488"/>
+            <a:off x="1042416" y="3878518"/>
+            <a:ext cx="10106863" cy="701163"/>
           </a:xfrm>
           <a:prstGeom prst="rect">
             <a:avLst/>
           </a:prstGeom>
         </p:spPr>
       </p:pic>
-      <p:sp>
-        <p:nvSpPr>
-          <p:cNvPr id="26" name="TextBox 25"/>
-          <p:cNvSpPr txBox="1"/>
-          <p:nvPr/>
-        </p:nvSpPr>
-        <p:spPr>
-          <a:xfrm>
-            <a:off x="7050024" y="3995928"/>
-            <a:ext cx="4062679" cy="1481328"/>
-          </a:xfrm>
-          <a:prstGeom prst="rect">
-            <a:avLst/>
-          </a:prstGeom>
-          <a:noFill/>
-        </p:spPr>
-        <p:txBody>
-          <a:bodyPr wrap="square" anchor="t" lIns="0" rIns="0" tIns="0" bIns="0">
-            <a:spAutoFit/>
-          </a:bodyPr>
-          <a:lstStyle/>
-          <a:p>
-            <a:pPr algn="l">
-              <a:lnSpc>
-                <a:spcPct val="120000"/>
-              </a:lnSpc>
-              <a:spcBef>
-                <a:spcPts val="0"/>
-              </a:spcBef>
-              <a:spcAft>
-                <a:spcPts val="0"/>
-              </a:spcAft>
-            </a:pPr>
-            <a:r>
-              <a:rPr sz="950" b="0">
-                <a:solidFill>
-                  <a:srgbClr val="8A9099"/>
-                </a:solidFill>
-                <a:latin typeface="Red Hat Text"/>
-              </a:rPr>
-              <a:t>A decision table (manifests / Kustomize / Helm / Operator) with "reach for it when…" column; Helm row highlighted "most apps"; Operator row flagged "only when reconcile is the value." Footer: "you ship install and upgrade, not just runtime."</a:t>
-            </a:r>
-          </a:p>
-        </p:txBody>
-      </p:sp>
       <p:cxnSp>
         <p:nvCxnSpPr>
-          <p:cNvPr id="27" name="Connector 26"/>
+          <p:cNvPr id="8" name="Connector 7"/>
           <p:cNvCxnSpPr/>
           <p:nvPr/>
         </p:nvCxnSpPr>
@@ -11921,7 +12196,7 @@
       </p:cxnSp>
       <p:sp>
         <p:nvSpPr>
-          <p:cNvPr id="28" name="TextBox 27"/>
+          <p:cNvPr id="9" name="TextBox 8"/>
           <p:cNvSpPr txBox="1"/>
           <p:nvPr/>
         </p:nvSpPr>
@@ -11966,7 +12241,7 @@
       </p:sp>
       <p:sp>
         <p:nvSpPr>
-          <p:cNvPr id="29" name="TextBox 28"/>
+          <p:cNvPr id="10" name="TextBox 9"/>
           <p:cNvSpPr txBox="1"/>
           <p:nvPr/>
         </p:nvSpPr>
@@ -12004,7 +12279,7 @@
                 </a:solidFill>
                 <a:latin typeface="Red Hat Text"/>
               </a:rPr>
-              <a:t>7</a:t>
+              <a:t>8</a:t>
             </a:r>
           </a:p>
         </p:txBody>
